--- a/TAZA/_документы/Структура ЦАКФ и проектного офиса ТК – от Айгерим 20.10.pptx
+++ b/TAZA/_документы/Структура ЦАКФ и проектного офиса ТК – от Айгерим 20.10.pptx
@@ -2965,8 +2965,8 @@
         </p:nvCxnSpPr>
         <p:spPr>
           <a:xfrm>
-            <a:off x="8470900" y="4800599"/>
-            <a:ext cx="0" cy="1600201"/>
+            <a:off x="8470900" y="4229100"/>
+            <a:ext cx="0" cy="2171700"/>
           </a:xfrm>
           <a:prstGeom prst="line">
             <a:avLst/>
@@ -3515,7 +3515,7 @@
         <p:spPr>
           <a:xfrm>
             <a:off x="9398000" y="2616200"/>
-            <a:ext cx="0" cy="1931737"/>
+            <a:ext cx="0" cy="1358900"/>
           </a:xfrm>
           <a:prstGeom prst="line">
             <a:avLst/>
@@ -4894,7 +4894,7 @@
                 </a:solidFill>
                 <a:latin typeface="Segoe UI" panose="020B0502040204020203" pitchFamily="34" charset="0"/>
               </a:rPr>
-              <a:t>Социологические исследования и аналитика (1+4)</a:t>
+              <a:t>Социологические исследования и аналитика (1+3)</a:t>
             </a:r>
             <a:endParaRPr lang="ru-RU" sz="1100" b="1" dirty="0">
               <a:solidFill>
@@ -5153,7 +5153,7 @@
                 </a:solidFill>
                 <a:latin typeface="Segoe UI" panose="020B0502040204020203" pitchFamily="34" charset="0"/>
               </a:rPr>
-              <a:t>Коммуникация и креатив (1+3)</a:t>
+              <a:t>Коммуникация и креатив (1+4)</a:t>
             </a:r>
             <a:endParaRPr lang="ru-RU" sz="1100" b="1" dirty="0">
               <a:solidFill>
@@ -6841,7 +6841,7 @@
                 </a:solidFill>
                 <a:latin typeface="Segoe UI" panose="020B0502040204020203" pitchFamily="34" charset="0"/>
               </a:rPr>
-              <a:t>в 2026 — 18, в 2027 — +12</a:t>
+              <a:t>окт. 2026 — 21, дек. — +2, 2027 — +7</a:t>
             </a:r>
             <a:endParaRPr lang="ru-RU" sz="800" i="1" dirty="0">
               <a:solidFill>
@@ -6989,7 +6989,7 @@
         </p:nvSpPr>
         <p:spPr>
           <a:xfrm>
-            <a:off x="7620000" y="4292599"/>
+            <a:off x="7620000" y="3721100"/>
             <a:ext cx="1701800" cy="508000"/>
           </a:xfrm>
           <a:prstGeom prst="roundRect">
@@ -7374,7 +7374,7 @@
                 </a:solidFill>
                 <a:latin typeface="Segoe UI" panose="020B0502040204020203" pitchFamily="34" charset="0"/>
               </a:rPr>
-              <a:t>в 2026 году — 18 чел.</a:t>
+              <a:t>с октября 2026 года — 21 чел., с декабря 2026 года — ещё 2</a:t>
             </a:r>
             <a:r>
               <a:rPr lang="ru-RU" sz="1000" dirty="0">
@@ -7392,7 +7392,7 @@
                 </a:solidFill>
                 <a:latin typeface="Segoe UI" panose="020B0502040204020203" pitchFamily="34" charset="0"/>
               </a:rPr>
-              <a:t>12</a:t>
+              <a:t>7</a:t>
             </a:r>
             <a:r>
               <a:rPr lang="ru-RU" sz="1000" dirty="0">
@@ -7605,7 +7605,7 @@
                 </a:solidFill>
                 <a:latin typeface="Segoe UI" panose="020B0502040204020203" pitchFamily="34" charset="0"/>
               </a:rPr>
-              <a:t>- Экспертный совет (1+4)</a:t>
+              <a:t>- Экспертный совет (1+3)</a:t>
             </a:r>
             <a:endParaRPr lang="ru-RU" sz="750" b="1" dirty="0">
               <a:solidFill>
@@ -7747,27 +7747,6 @@
           </a:p>
         </p:txBody>
       </p:sp>
-      <p:cxnSp>
-        <p:nvCxnSpPr>
-          <p:cNvPr id="111" name="Линия 425"/>
-          <p:cNvCxnSpPr/>
-          <p:nvPr/>
-        </p:nvCxnSpPr>
-        <p:spPr>
-          <a:xfrm>
-            <a:off x="9321800" y="3937000"/>
-            <a:ext cx="76200" cy="0"/>
-          </a:xfrm>
-          <a:prstGeom prst="line">
-            <a:avLst/>
-          </a:prstGeom>
-          <a:ln w="12700">
-            <a:solidFill>
-              <a:srgbClr val="1F3864"/>
-            </a:solidFill>
-          </a:ln>
-        </p:spPr>
-      </p:cxnSp>
       <p:sp>
         <p:nvSpPr>
           <p:cNvPr id="2" name="Легенда 2027">
@@ -7843,106 +7822,6 @@
               </a:rPr>
               <a:t>приход в декабре 2026 года</a:t>
             </a:r>
-          </a:p>
-        </p:txBody>
-      </p:sp>
-      <p:sp>
-        <p:nvSpPr>
-          <p:cNvPr id="6" name="Сотрудник 310">
-            <a:extLst>
-              <a:ext uri="{FF2B5EF4-FFF2-40B4-BE49-F238E27FC236}">
-                <a16:creationId xmlns:a16="http://schemas.microsoft.com/office/drawing/2014/main" id="{163749FB-20C2-FA61-907E-06828F3AFD19}"/>
-              </a:ext>
-            </a:extLst>
-          </p:cNvPr>
-          <p:cNvSpPr/>
-          <p:nvPr/>
-        </p:nvSpPr>
-        <p:spPr>
-          <a:xfrm>
-            <a:off x="7607300" y="3721100"/>
-            <a:ext cx="1701800" cy="508000"/>
-          </a:xfrm>
-          <a:prstGeom prst="roundRect">
-            <a:avLst>
-              <a:gd name="adj" fmla="val 12000"/>
-            </a:avLst>
-          </a:prstGeom>
-          <a:solidFill>
-            <a:srgbClr val="E6DFF3"/>
-          </a:solidFill>
-          <a:ln w="12700">
-            <a:solidFill>
-              <a:srgbClr val="1F3864"/>
-            </a:solidFill>
-          </a:ln>
-        </p:spPr>
-        <p:txBody>
-          <a:bodyPr lIns="50800" tIns="12700" rIns="50800" bIns="12700" rtlCol="0" anchor="ctr"/>
-          <a:lstStyle/>
-          <a:p>
-            <a:pPr algn="ctr">
-              <a:lnSpc>
-                <a:spcPct val="90000"/>
-              </a:lnSpc>
-            </a:pPr>
-            <a:r>
-              <a:rPr lang="ru-RU" sz="1000" dirty="0">
-                <a:solidFill>
-                  <a:srgbClr val="464646"/>
-                </a:solidFill>
-                <a:latin typeface="Segoe UI" panose="020B0502040204020203" pitchFamily="34" charset="0"/>
-              </a:rPr>
-              <a:t>Эксперт</a:t>
-            </a:r>
-          </a:p>
-          <a:p>
-            <a:pPr algn="ctr">
-              <a:lnSpc>
-                <a:spcPct val="90000"/>
-              </a:lnSpc>
-            </a:pPr>
-            <a:r>
-              <a:rPr lang="ru-RU" sz="1000" b="1" dirty="0" err="1">
-                <a:solidFill>
-                  <a:srgbClr val="1F3864"/>
-                </a:solidFill>
-                <a:latin typeface="Segoe UI" panose="020B0502040204020203" pitchFamily="34" charset="0"/>
-              </a:rPr>
-              <a:t>Абулхан</a:t>
-            </a:r>
-            <a:r>
-              <a:rPr lang="ru-RU" sz="1000" b="1" dirty="0">
-                <a:solidFill>
-                  <a:srgbClr val="1F3864"/>
-                </a:solidFill>
-                <a:latin typeface="Segoe UI" panose="020B0502040204020203" pitchFamily="34" charset="0"/>
-              </a:rPr>
-              <a:t> А</a:t>
-            </a:r>
-            <a:br>
-              <a:rPr lang="ru-RU" sz="900" b="0" dirty="0">
-                <a:solidFill>
-                  <a:srgbClr val="227838"/>
-                </a:solidFill>
-                <a:latin typeface="Segoe UI" panose="020B0502040204020203" pitchFamily="34" charset="0"/>
-              </a:rPr>
-            </a:br>
-            <a:r>
-              <a:rPr lang="ru-RU" sz="900" b="0" dirty="0">
-                <a:solidFill>
-                  <a:srgbClr val="227838"/>
-                </a:solidFill>
-                <a:latin typeface="Segoe UI" panose="020B0502040204020203" pitchFamily="34" charset="0"/>
-              </a:rPr>
-              <a:t>800 000</a:t>
-            </a:r>
-            <a:endParaRPr lang="ru-RU" sz="1100" b="1" dirty="0">
-              <a:solidFill>
-                <a:srgbClr val="1F3864"/>
-              </a:solidFill>
-              <a:latin typeface="Segoe UI" panose="020B0502040204020203" pitchFamily="34" charset="0"/>
-            </a:endParaRPr>
           </a:p>
         </p:txBody>
       </p:sp>
@@ -7960,7 +7839,7 @@
         </p:nvCxnSpPr>
         <p:spPr>
           <a:xfrm>
-            <a:off x="9321800" y="4538579"/>
+            <a:off x="9321800" y="3975100"/>
             <a:ext cx="76200" cy="0"/>
           </a:xfrm>
           <a:prstGeom prst="line">

--- a/TAZA/_документы/Структура ЦАКФ и проектного офиса ТК – от Айгерим 20.10.pptx
+++ b/TAZA/_документы/Структура ЦАКФ и проектного офиса ТК – от Айгерим 20.10.pptx
@@ -6841,7 +6841,7 @@
                 </a:solidFill>
                 <a:latin typeface="Segoe UI" panose="020B0502040204020203" pitchFamily="34" charset="0"/>
               </a:rPr>
-              <a:t>окт. 2026 — 21, дек. — +2, 2027 — +7</a:t>
+              <a:t>нояб. 2026 — 21, дек. — +2, 2027 — +7</a:t>
             </a:r>
             <a:endParaRPr lang="ru-RU" sz="800" i="1" dirty="0">
               <a:solidFill>
@@ -7374,7 +7374,7 @@
                 </a:solidFill>
                 <a:latin typeface="Segoe UI" panose="020B0502040204020203" pitchFamily="34" charset="0"/>
               </a:rPr>
-              <a:t>с октября 2026 года — 21 чел., с декабря 2026 года — ещё 2</a:t>
+              <a:t>с ноября 2026 года — 21 чел., с декабря 2026 года — ещё 2</a:t>
             </a:r>
             <a:r>
               <a:rPr lang="ru-RU" sz="1000" dirty="0">

--- a/TAZA/_документы/Структура ЦАКФ и проектного офиса ТК – от Айгерим 20.10.pptx
+++ b/TAZA/_документы/Структура ЦАКФ и проектного офиса ТК – от Айгерим 20.10.pptx
@@ -3529,134 +3529,6 @@
       </p:cxnSp>
       <p:cxnSp>
         <p:nvCxnSpPr>
-          <p:cNvPr id="422" name="Линия 422"/>
-          <p:cNvCxnSpPr/>
-          <p:nvPr/>
-        </p:nvCxnSpPr>
-        <p:spPr>
-          <a:xfrm>
-            <a:off x="6007100" y="1854200"/>
-            <a:ext cx="0" cy="50800"/>
-          </a:xfrm>
-          <a:prstGeom prst="line">
-            <a:avLst/>
-          </a:prstGeom>
-          <a:ln w="15875">
-            <a:solidFill>
-              <a:srgbClr val="1F3864"/>
-            </a:solidFill>
-            <a:prstDash val="dash"/>
-          </a:ln>
-        </p:spPr>
-      </p:cxnSp>
-      <p:cxnSp>
-        <p:nvCxnSpPr>
-          <p:cNvPr id="421" name="Линия 421"/>
-          <p:cNvCxnSpPr/>
-          <p:nvPr/>
-        </p:nvCxnSpPr>
-        <p:spPr>
-          <a:xfrm>
-            <a:off x="6007100" y="1854200"/>
-            <a:ext cx="2438400" cy="0"/>
-          </a:xfrm>
-          <a:prstGeom prst="line">
-            <a:avLst/>
-          </a:prstGeom>
-          <a:ln w="15875">
-            <a:solidFill>
-              <a:srgbClr val="1F3864"/>
-            </a:solidFill>
-            <a:prstDash val="dash"/>
-          </a:ln>
-        </p:spPr>
-      </p:cxnSp>
-      <p:cxnSp>
-        <p:nvCxnSpPr>
-          <p:cNvPr id="420" name="Линия 420"/>
-          <p:cNvCxnSpPr/>
-          <p:nvPr/>
-        </p:nvCxnSpPr>
-        <p:spPr>
-          <a:xfrm>
-            <a:off x="8445500" y="1854200"/>
-            <a:ext cx="0" cy="50800"/>
-          </a:xfrm>
-          <a:prstGeom prst="line">
-            <a:avLst/>
-          </a:prstGeom>
-          <a:ln w="15875">
-            <a:solidFill>
-              <a:srgbClr val="1F3864"/>
-            </a:solidFill>
-          </a:ln>
-        </p:spPr>
-      </p:cxnSp>
-      <p:cxnSp>
-        <p:nvCxnSpPr>
-          <p:cNvPr id="419" name="Линия 419"/>
-          <p:cNvCxnSpPr/>
-          <p:nvPr/>
-        </p:nvCxnSpPr>
-        <p:spPr>
-          <a:xfrm>
-            <a:off x="8445500" y="1854200"/>
-            <a:ext cx="1104900" cy="0"/>
-          </a:xfrm>
-          <a:prstGeom prst="line">
-            <a:avLst/>
-          </a:prstGeom>
-          <a:ln w="15875">
-            <a:solidFill>
-              <a:srgbClr val="1F3864"/>
-            </a:solidFill>
-          </a:ln>
-        </p:spPr>
-      </p:cxnSp>
-      <p:cxnSp>
-        <p:nvCxnSpPr>
-          <p:cNvPr id="418" name="Линия 418"/>
-          <p:cNvCxnSpPr/>
-          <p:nvPr/>
-        </p:nvCxnSpPr>
-        <p:spPr>
-          <a:xfrm>
-            <a:off x="9550400" y="1663700"/>
-            <a:ext cx="0" cy="190500"/>
-          </a:xfrm>
-          <a:prstGeom prst="line">
-            <a:avLst/>
-          </a:prstGeom>
-          <a:ln w="15875">
-            <a:solidFill>
-              <a:srgbClr val="1F3864"/>
-            </a:solidFill>
-          </a:ln>
-        </p:spPr>
-      </p:cxnSp>
-      <p:cxnSp>
-        <p:nvCxnSpPr>
-          <p:cNvPr id="417" name="Линия 417"/>
-          <p:cNvCxnSpPr/>
-          <p:nvPr/>
-        </p:nvCxnSpPr>
-        <p:spPr>
-          <a:xfrm>
-            <a:off x="9550400" y="1663700"/>
-            <a:ext cx="50800" cy="0"/>
-          </a:xfrm>
-          <a:prstGeom prst="line">
-            <a:avLst/>
-          </a:prstGeom>
-          <a:ln w="15875">
-            <a:solidFill>
-              <a:srgbClr val="1F3864"/>
-            </a:solidFill>
-          </a:ln>
-        </p:spPr>
-      </p:cxnSp>
-      <p:cxnSp>
-        <p:nvCxnSpPr>
           <p:cNvPr id="416" name="Линия 416"/>
           <p:cNvCxnSpPr/>
           <p:nvPr/>
@@ -3869,6 +3741,27 @@
       </p:cxnSp>
       <p:cxnSp>
         <p:nvCxnSpPr>
+          <p:cNvPr id="460" name="Линия ГИД – ПО для ЦА"/>
+          <p:cNvCxnSpPr/>
+          <p:nvPr/>
+        </p:nvCxnSpPr>
+        <p:spPr>
+          <a:xfrm>
+            <a:off x="8445500" y="1003300"/>
+            <a:ext cx="0" cy="901700"/>
+          </a:xfrm>
+          <a:prstGeom prst="line">
+            <a:avLst/>
+          </a:prstGeom>
+          <a:ln w="15875">
+            <a:solidFill>
+              <a:srgbClr val="1F3864"/>
+            </a:solidFill>
+          </a:ln>
+        </p:spPr>
+      </p:cxnSp>
+      <p:cxnSp>
+        <p:nvCxnSpPr>
           <p:cNvPr id="453" name="Линия 453"/>
           <p:cNvCxnSpPr/>
           <p:nvPr/>
@@ -3896,7 +3789,7 @@
         </p:nvCxnSpPr>
         <p:spPr>
           <a:xfrm>
-            <a:off x="11607800" y="3924300"/>
+            <a:off x="11607800" y="3594100"/>
             <a:ext cx="25400" cy="0"/>
           </a:xfrm>
           <a:prstGeom prst="line">
@@ -3917,7 +3810,7 @@
         </p:nvCxnSpPr>
         <p:spPr>
           <a:xfrm>
-            <a:off x="11633200" y="3708400"/>
+            <a:off x="11633200" y="3378200"/>
             <a:ext cx="0" cy="215900"/>
           </a:xfrm>
           <a:prstGeom prst="line">
@@ -3938,7 +3831,7 @@
         </p:nvCxnSpPr>
         <p:spPr>
           <a:xfrm>
-            <a:off x="11607800" y="3111500"/>
+            <a:off x="11607800" y="2806700"/>
             <a:ext cx="25400" cy="0"/>
           </a:xfrm>
           <a:prstGeom prst="line">
@@ -3959,7 +3852,7 @@
         </p:nvCxnSpPr>
         <p:spPr>
           <a:xfrm>
-            <a:off x="11607800" y="2781300"/>
+            <a:off x="11607800" y="2476500"/>
             <a:ext cx="25400" cy="0"/>
           </a:xfrm>
           <a:prstGeom prst="line">
@@ -3980,7 +3873,7 @@
         </p:nvCxnSpPr>
         <p:spPr>
           <a:xfrm>
-            <a:off x="11633200" y="2590800"/>
+            <a:off x="11633200" y="2286000"/>
             <a:ext cx="0" cy="520700"/>
           </a:xfrm>
           <a:prstGeom prst="line">
@@ -4001,7 +3894,7 @@
         </p:nvCxnSpPr>
         <p:spPr>
           <a:xfrm>
-            <a:off x="11734800" y="3543300"/>
+            <a:off x="11734800" y="3213100"/>
             <a:ext cx="127000" cy="0"/>
           </a:xfrm>
           <a:prstGeom prst="line">
@@ -4022,7 +3915,7 @@
         </p:nvCxnSpPr>
         <p:spPr>
           <a:xfrm>
-            <a:off x="11734800" y="2349500"/>
+            <a:off x="11734800" y="2044700"/>
             <a:ext cx="127000" cy="0"/>
           </a:xfrm>
           <a:prstGeom prst="line">
@@ -4043,7 +3936,7 @@
         </p:nvCxnSpPr>
         <p:spPr>
           <a:xfrm>
-            <a:off x="11734800" y="1663700"/>
+            <a:off x="11734800" y="1511300"/>
             <a:ext cx="127000" cy="0"/>
           </a:xfrm>
           <a:prstGeom prst="line">
@@ -4065,7 +3958,7 @@
         <p:spPr>
           <a:xfrm>
             <a:off x="11861800" y="1219200"/>
-            <a:ext cx="0" cy="2324100"/>
+            <a:ext cx="0" cy="1993900"/>
           </a:xfrm>
           <a:prstGeom prst="line">
             <a:avLst/>
@@ -4293,7 +4186,7 @@
         </p:nvSpPr>
         <p:spPr>
           <a:xfrm>
-            <a:off x="9601200" y="1473200"/>
+            <a:off x="9601200" y="1320800"/>
             <a:ext cx="2133600" cy="381000"/>
           </a:xfrm>
           <a:prstGeom prst="roundRect">
@@ -4326,7 +4219,7 @@
                 </a:solidFill>
                 <a:latin typeface="Segoe UI" panose="020B0502040204020203" pitchFamily="34" charset="0"/>
               </a:rPr>
-              <a:t>Зам. ГИД по стратегии и проектам</a:t>
+              <a:t>Советник ГИД по стратегии и науке</a:t>
             </a:r>
             <a:endParaRPr lang="ru-RU" sz="900" dirty="0">
               <a:solidFill>
@@ -4376,7 +4269,7 @@
         </p:nvSpPr>
         <p:spPr>
           <a:xfrm>
-            <a:off x="9601200" y="2108200"/>
+            <a:off x="9601200" y="1803400"/>
             <a:ext cx="2133600" cy="482600"/>
           </a:xfrm>
           <a:prstGeom prst="roundRect">
@@ -4472,7 +4365,7 @@
         </p:nvSpPr>
         <p:spPr>
           <a:xfrm>
-            <a:off x="9601200" y="3378200"/>
+            <a:off x="9601200" y="3048000"/>
             <a:ext cx="2133600" cy="330200"/>
           </a:xfrm>
           <a:prstGeom prst="roundRect">
@@ -4552,7 +4445,7 @@
         </p:nvSpPr>
         <p:spPr>
           <a:xfrm>
-            <a:off x="9601200" y="3759200"/>
+            <a:off x="9601200" y="3429000"/>
             <a:ext cx="2006600" cy="330200"/>
           </a:xfrm>
           <a:prstGeom prst="roundRect">
@@ -7220,7 +7113,7 @@
         </p:nvSpPr>
         <p:spPr>
           <a:xfrm>
-            <a:off x="9601200" y="2971800"/>
+            <a:off x="9601200" y="2667000"/>
             <a:ext cx="2006600" cy="279400"/>
           </a:xfrm>
           <a:prstGeom prst="roundRect">
@@ -7473,7 +7366,7 @@
                 </a:solidFill>
                 <a:latin typeface="Segoe UI" panose="020B0502040204020203" pitchFamily="34" charset="0"/>
               </a:rPr>
-              <a:t>1 200 000</a:t>
+              <a:t>1 000 000</a:t>
             </a:r>
             <a:endParaRPr lang="ru-RU" sz="1000" dirty="0">
               <a:solidFill>
@@ -7492,7 +7385,7 @@
         </p:nvSpPr>
         <p:spPr>
           <a:xfrm>
-            <a:off x="9601200" y="2641600"/>
+            <a:off x="9601200" y="2336800"/>
             <a:ext cx="2006600" cy="279400"/>
           </a:xfrm>
           <a:prstGeom prst="roundRect">
@@ -7666,7 +7559,7 @@
                 </a:solidFill>
                 <a:latin typeface="Segoe UI" panose="020B0502040204020203" pitchFamily="34" charset="0"/>
               </a:rPr>
-              <a:t>Юнусов Т.</a:t>
+              <a:t>вакансия</a:t>
             </a:r>
             <a:r>
               <a:rPr lang="ru-RU" sz="900" b="0" dirty="0">

--- a/TAZA/_документы/Структура ЦАКФ и проектного офиса ТК – от Айгерим 20.10.pptx
+++ b/TAZA/_документы/Структура ЦАКФ и проектного офиса ТК – от Айгерим 20.10.pptx
@@ -7482,30 +7482,8 @@
                 </a:solidFill>
                 <a:latin typeface="Segoe UI" panose="020B0502040204020203" pitchFamily="34" charset="0"/>
               </a:rPr>
-              <a:t>Проектный офис для Центральной Азии по изменению климата и зеленой энергетике </a:t>
-            </a:r>
-          </a:p>
-          <a:p>
-            <a:pPr algn="ctr">
-              <a:lnSpc>
-                <a:spcPct val="90000"/>
-              </a:lnSpc>
-            </a:pPr>
-            <a:r>
-              <a:rPr lang="ru-RU" sz="750" b="1">
-                <a:solidFill>
-                  <a:srgbClr val="FFFFFF"/>
-                </a:solidFill>
-                <a:latin typeface="Segoe UI" panose="020B0502040204020203" pitchFamily="34" charset="0"/>
-              </a:rPr>
-              <a:t>- Экспертный совет (1+3)</a:t>
-            </a:r>
-            <a:endParaRPr lang="ru-RU" sz="750" b="1" dirty="0">
-              <a:solidFill>
-                <a:srgbClr val="FFFFFF"/>
-              </a:solidFill>
-              <a:latin typeface="Segoe UI" panose="020B0502040204020203" pitchFamily="34" charset="0"/>
-            </a:endParaRPr>
+              <a:t>Проектный офис для Центральной Азии по изменению климата и зеленой энергетике (1+3)</a:t>
+            </a:r>
           </a:p>
         </p:txBody>
       </p:sp>

--- a/TAZA/_документы/Структура ЦАКФ и проектного офиса ТК – от Айгерим 20.10.pptx
+++ b/TAZA/_документы/Структура ЦАКФ и проектного офиса ТК – от Айгерим 20.10.pptx
@@ -5296,7 +5296,7 @@
                 </a:solidFill>
                 <a:latin typeface="Segoe UI" panose="020B0502040204020203" pitchFamily="34" charset="0"/>
               </a:rPr>
-              <a:t> А.</a:t>
+              <a:t> Алибек</a:t>
             </a:r>
             <a:r>
               <a:rPr lang="en-US" sz="900" dirty="0">

--- a/TAZA/_документы/Структура ЦАКФ и проектного офиса ТК – от Айгерим 20.10.pptx
+++ b/TAZA/_документы/Структура ЦАКФ и проектного офиса ТК – от Айгерим 20.10.pptx
@@ -2965,8 +2965,8 @@
         </p:nvCxnSpPr>
         <p:spPr>
           <a:xfrm>
-            <a:off x="8470900" y="4229100"/>
-            <a:ext cx="0" cy="2171700"/>
+            <a:off x="8470900" y="4826000"/>
+            <a:ext cx="0" cy="1574800"/>
           </a:xfrm>
           <a:prstGeom prst="line">
             <a:avLst/>
@@ -3515,7 +3515,7 @@
         <p:spPr>
           <a:xfrm>
             <a:off x="9398000" y="2616200"/>
-            <a:ext cx="0" cy="1358900"/>
+            <a:ext cx="0" cy="1955800"/>
           </a:xfrm>
           <a:prstGeom prst="line">
             <a:avLst/>
@@ -6882,7 +6882,7 @@
         </p:nvSpPr>
         <p:spPr>
           <a:xfrm>
-            <a:off x="7620000" y="3721100"/>
+            <a:off x="7620000" y="4318000"/>
             <a:ext cx="1701800" cy="508000"/>
           </a:xfrm>
           <a:prstGeom prst="roundRect">
@@ -7045,6 +7045,91 @@
       </p:sp>
       <p:sp>
         <p:nvSpPr>
+          <p:cNvPr id="461" name="Сотрудник Абулхан"/>
+          <p:cNvSpPr/>
+          <p:nvPr/>
+        </p:nvSpPr>
+        <p:spPr>
+          <a:xfrm>
+            <a:off x="7620000" y="3721100"/>
+            <a:ext cx="1701800" cy="508000"/>
+          </a:xfrm>
+          <a:prstGeom prst="roundRect">
+            <a:avLst>
+              <a:gd name="adj" fmla="val 12000"/>
+            </a:avLst>
+          </a:prstGeom>
+          <a:solidFill>
+            <a:srgbClr val="E6DFF3"/>
+          </a:solidFill>
+          <a:ln w="12700">
+            <a:solidFill>
+              <a:srgbClr val="1F3864"/>
+            </a:solidFill>
+          </a:ln>
+        </p:spPr>
+        <p:txBody>
+          <a:bodyPr lIns="50800" tIns="12700" rIns="50800" bIns="12700" rtlCol="0" anchor="ctr"/>
+          <a:lstStyle/>
+          <a:p>
+            <a:pPr algn="ctr">
+              <a:lnSpc>
+                <a:spcPct val="90000"/>
+              </a:lnSpc>
+            </a:pPr>
+            <a:r>
+              <a:rPr lang="ru-RU" sz="1000" dirty="0">
+                <a:solidFill>
+                  <a:srgbClr val="464646"/>
+                </a:solidFill>
+                <a:latin typeface="Segoe UI" panose="020B0502040204020203" pitchFamily="34" charset="0"/>
+              </a:rPr>
+              <a:t>Эксперт</a:t>
+            </a:r>
+          </a:p>
+          <a:p>
+            <a:pPr algn="ctr">
+              <a:lnSpc>
+                <a:spcPct val="90000"/>
+              </a:lnSpc>
+            </a:pPr>
+            <a:r>
+              <a:rPr lang="ru-RU" sz="1000" b="1" dirty="0">
+                <a:solidFill>
+                  <a:srgbClr val="1F3864"/>
+                </a:solidFill>
+                <a:latin typeface="Segoe UI" panose="020B0502040204020203" pitchFamily="34" charset="0"/>
+              </a:rPr>
+              <a:t>Абулхан А.</a:t>
+            </a:r>
+            <a:br>
+              <a:rPr lang="ru-RU" sz="900" b="0" dirty="0">
+                <a:solidFill>
+                  <a:srgbClr val="227838"/>
+                </a:solidFill>
+                <a:latin typeface="Segoe UI" panose="020B0502040204020203" pitchFamily="34" charset="0"/>
+              </a:rPr>
+            </a:br>
+            <a:r>
+              <a:rPr lang="ru-RU" sz="900" b="0" dirty="0">
+                <a:solidFill>
+                  <a:srgbClr val="227838"/>
+                </a:solidFill>
+                <a:latin typeface="Segoe UI" panose="020B0502040204020203" pitchFamily="34" charset="0"/>
+              </a:rPr>
+              <a:t>800 000</a:t>
+            </a:r>
+            <a:endParaRPr lang="ru-RU" sz="1100" b="1" dirty="0">
+              <a:solidFill>
+                <a:srgbClr val="1F3864"/>
+              </a:solidFill>
+              <a:latin typeface="Segoe UI" panose="020B0502040204020203" pitchFamily="34" charset="0"/>
+            </a:endParaRPr>
+          </a:p>
+        </p:txBody>
+      </p:sp>
+      <p:sp>
+        <p:nvSpPr>
           <p:cNvPr id="316" name="Аутсорс 316"/>
           <p:cNvSpPr/>
           <p:nvPr/>
@@ -7482,7 +7567,7 @@
                 </a:solidFill>
                 <a:latin typeface="Segoe UI" panose="020B0502040204020203" pitchFamily="34" charset="0"/>
               </a:rPr>
-              <a:t>Проектный офис для Центральной Азии по изменению климата и зеленой энергетике (1+3)</a:t>
+              <a:t>Проектный офис для Центральной Азии по изменению климата и зеленой энергетике (4)</a:t>
             </a:r>
           </a:p>
         </p:txBody>
@@ -7537,7 +7622,7 @@
                 </a:solidFill>
                 <a:latin typeface="Segoe UI" panose="020B0502040204020203" pitchFamily="34" charset="0"/>
               </a:rPr>
-              <a:t>вакансия</a:t>
+              <a:t>ГИД Қаражан Е.Н.</a:t>
             </a:r>
             <a:r>
               <a:rPr lang="ru-RU" sz="900" b="0" dirty="0">
@@ -7546,7 +7631,7 @@
                 </a:solidFill>
                 <a:latin typeface="Segoe UI" panose="020B0502040204020203" pitchFamily="34" charset="0"/>
               </a:rPr>
-              <a:t> · 1 300 000</a:t>
+              <a:t/>
             </a:r>
             <a:endParaRPr lang="ru-RU" sz="1100" b="1" dirty="0">
               <a:solidFill>
@@ -7699,6 +7784,33 @@
       <p:cxnSp>
         <p:nvCxnSpPr>
           <p:cNvPr id="12" name="Линия 425">
+            <a:extLst>
+              <a:ext uri="{FF2B5EF4-FFF2-40B4-BE49-F238E27FC236}">
+                <a16:creationId xmlns:a16="http://schemas.microsoft.com/office/drawing/2014/main" id="{AD76B413-4769-5E41-CC9B-90090C0E5C57}"/>
+              </a:ext>
+            </a:extLst>
+          </p:cNvPr>
+          <p:cNvCxnSpPr/>
+          <p:nvPr/>
+        </p:nvCxnSpPr>
+        <p:spPr>
+          <a:xfrm>
+            <a:off x="9321800" y="4572000"/>
+            <a:ext cx="76200" cy="0"/>
+          </a:xfrm>
+          <a:prstGeom prst="line">
+            <a:avLst/>
+          </a:prstGeom>
+          <a:ln w="12700">
+            <a:solidFill>
+              <a:srgbClr val="1F3864"/>
+            </a:solidFill>
+          </a:ln>
+        </p:spPr>
+      </p:cxnSp>
+      <p:cxnSp>
+        <p:nvCxnSpPr>
+          <p:cNvPr id="462" name="Линия Абулхан">
             <a:extLst>
               <a:ext uri="{FF2B5EF4-FFF2-40B4-BE49-F238E27FC236}">
                 <a16:creationId xmlns:a16="http://schemas.microsoft.com/office/drawing/2014/main" id="{AD76B413-4769-5E41-CC9B-90090C0E5C57}"/>

--- a/TAZA/_документы/Структура ЦАКФ и проектного офиса ТК – от Айгерим 20.10.pptx
+++ b/TAZA/_документы/Структура ЦАКФ и проектного офиса ТК – от Айгерим 20.10.pptx
@@ -6734,7 +6734,7 @@
                 </a:solidFill>
                 <a:latin typeface="Segoe UI" panose="020B0502040204020203" pitchFamily="34" charset="0"/>
               </a:rPr>
-              <a:t>нояб. 2026 — 21, дек. — +2, 2027 — +7</a:t>
+              <a:t>нояб. 2026 — 23, дек. — +2, 2027 — +5</a:t>
             </a:r>
             <a:endParaRPr lang="ru-RU" sz="800" i="1" dirty="0">
               <a:solidFill>
@@ -6975,7 +6975,7 @@
             </a:avLst>
           </a:prstGeom>
           <a:solidFill>
-            <a:srgbClr val="E6DFF3"/>
+            <a:srgbClr val="D6E1EE"/>
           </a:solidFill>
           <a:ln w="12700">
             <a:solidFill>
@@ -7032,7 +7032,7 @@
                 </a:solidFill>
                 <a:latin typeface="Segoe UI" panose="020B0502040204020203" pitchFamily="34" charset="0"/>
               </a:rPr>
-              <a:t>800 000</a:t>
+              <a:t>615 000</a:t>
             </a:r>
             <a:endParaRPr lang="ru-RU" sz="1100" b="1" dirty="0">
               <a:solidFill>
@@ -7060,7 +7060,7 @@
             </a:avLst>
           </a:prstGeom>
           <a:solidFill>
-            <a:srgbClr val="E6DFF3"/>
+            <a:srgbClr val="D6E1EE"/>
           </a:solidFill>
           <a:ln w="12700">
             <a:solidFill>
@@ -7117,7 +7117,7 @@
                 </a:solidFill>
                 <a:latin typeface="Segoe UI" panose="020B0502040204020203" pitchFamily="34" charset="0"/>
               </a:rPr>
-              <a:t>800 000</a:t>
+              <a:t>615 000</a:t>
             </a:r>
             <a:endParaRPr lang="ru-RU" sz="1100" b="1" dirty="0">
               <a:solidFill>
@@ -7352,7 +7352,7 @@
                 </a:solidFill>
                 <a:latin typeface="Segoe UI" panose="020B0502040204020203" pitchFamily="34" charset="0"/>
               </a:rPr>
-              <a:t>с ноября 2026 года — 21 чел., с декабря 2026 года — ещё 2</a:t>
+              <a:t>с ноября 2026 года — 23 чел., с декабря 2026 года — ещё 2</a:t>
             </a:r>
             <a:r>
               <a:rPr lang="ru-RU" sz="1000" dirty="0">
@@ -7370,7 +7370,7 @@
                 </a:solidFill>
                 <a:latin typeface="Segoe UI" panose="020B0502040204020203" pitchFamily="34" charset="0"/>
               </a:rPr>
-              <a:t>7</a:t>
+              <a:t>5</a:t>
             </a:r>
             <a:r>
               <a:rPr lang="ru-RU" sz="1000" dirty="0">

--- a/TAZA/_документы/Структура ЦАКФ и проектного офиса ТК – от Айгерим 20.10.pptx
+++ b/TAZA/_документы/Структура ЦАКФ и проектного офиса ТК – от Айгерим 20.10.pptx
@@ -5,7 +5,7 @@
     <p:sldMasterId id="2147483648" r:id="rId1"/>
   </p:sldMasterIdLst>
   <p:sldIdLst>
-    <p:sldId id="256" r:id="rId2"/>
+    <p:sldId id="256" r:id="rId3"/>
   </p:sldIdLst>
   <p:sldSz cx="12192000" cy="6858000"/>
   <p:notesSz cx="6858000" cy="9144000"/>
@@ -104,11 +104,6 @@
       </a:defRPr>
     </a:lvl9pPr>
   </p:defaultTextStyle>
-  <p:extLst>
-    <p:ext uri="{EFAFB233-063F-42B5-8137-9DF3F51BA10A}">
-      <p15:sldGuideLst xmlns:p15="http://schemas.microsoft.com/office/powerpoint/2012/main"/>
-    </p:ext>
-  </p:extLst>
 </p:presentation>
 </file>
 
@@ -157,6 +152,7 @@
               <a:rPr lang="ru-RU"/>
               <a:t>Образец заголовка</a:t>
             </a:r>
+            <a:endParaRPr lang="ru-RU"/>
           </a:p>
         </p:txBody>
       </p:sp>
@@ -221,6 +217,7 @@
               <a:rPr lang="ru-RU"/>
               <a:t>Образец подзаголовка</a:t>
             </a:r>
+            <a:endParaRPr lang="ru-RU"/>
           </a:p>
         </p:txBody>
       </p:sp>
@@ -241,7 +238,6 @@
           <a:p>
             <a:fld id="{C2BA13B7-D241-4424-B4BE-2E78B20DBCAC}" type="datetimeFigureOut">
               <a:rPr lang="ru-RU" smtClean="0"/>
-              <a:t>20.10.2026</a:t>
             </a:fld>
             <a:endParaRPr lang="ru-RU"/>
           </a:p>
@@ -283,7 +279,6 @@
           <a:p>
             <a:fld id="{C429094C-EE5E-46D5-9F99-8551D18087AF}" type="slidenum">
               <a:rPr lang="ru-RU" smtClean="0"/>
-              <a:t>‹#›</a:t>
             </a:fld>
             <a:endParaRPr lang="ru-RU"/>
           </a:p>
@@ -333,6 +328,7 @@
               <a:rPr lang="ru-RU"/>
               <a:t>Образец заголовка</a:t>
             </a:r>
+            <a:endParaRPr lang="ru-RU"/>
           </a:p>
         </p:txBody>
       </p:sp>
@@ -356,6 +352,7 @@
               <a:rPr lang="ru-RU"/>
               <a:t>Образец текста</a:t>
             </a:r>
+            <a:endParaRPr lang="ru-RU"/>
           </a:p>
           <a:p>
             <a:pPr lvl="1"/>
@@ -363,6 +360,7 @@
               <a:rPr lang="ru-RU"/>
               <a:t>Второй уровень</a:t>
             </a:r>
+            <a:endParaRPr lang="ru-RU"/>
           </a:p>
           <a:p>
             <a:pPr lvl="2"/>
@@ -370,6 +368,7 @@
               <a:rPr lang="ru-RU"/>
               <a:t>Третий уровень</a:t>
             </a:r>
+            <a:endParaRPr lang="ru-RU"/>
           </a:p>
           <a:p>
             <a:pPr lvl="3"/>
@@ -377,6 +376,7 @@
               <a:rPr lang="ru-RU"/>
               <a:t>Четвертый уровень</a:t>
             </a:r>
+            <a:endParaRPr lang="ru-RU"/>
           </a:p>
           <a:p>
             <a:pPr lvl="4"/>
@@ -384,6 +384,7 @@
               <a:rPr lang="ru-RU"/>
               <a:t>Пятый уровень</a:t>
             </a:r>
+            <a:endParaRPr lang="ru-RU"/>
           </a:p>
         </p:txBody>
       </p:sp>
@@ -404,7 +405,6 @@
           <a:p>
             <a:fld id="{C2BA13B7-D241-4424-B4BE-2E78B20DBCAC}" type="datetimeFigureOut">
               <a:rPr lang="ru-RU" smtClean="0"/>
-              <a:t>20.10.2026</a:t>
             </a:fld>
             <a:endParaRPr lang="ru-RU"/>
           </a:p>
@@ -446,7 +446,6 @@
           <a:p>
             <a:fld id="{C429094C-EE5E-46D5-9F99-8551D18087AF}" type="slidenum">
               <a:rPr lang="ru-RU" smtClean="0"/>
-              <a:t>‹#›</a:t>
             </a:fld>
             <a:endParaRPr lang="ru-RU"/>
           </a:p>
@@ -501,6 +500,7 @@
               <a:rPr lang="ru-RU"/>
               <a:t>Образец заголовка</a:t>
             </a:r>
+            <a:endParaRPr lang="ru-RU"/>
           </a:p>
         </p:txBody>
       </p:sp>
@@ -529,6 +529,7 @@
               <a:rPr lang="ru-RU"/>
               <a:t>Образец текста</a:t>
             </a:r>
+            <a:endParaRPr lang="ru-RU"/>
           </a:p>
           <a:p>
             <a:pPr lvl="1"/>
@@ -536,6 +537,7 @@
               <a:rPr lang="ru-RU"/>
               <a:t>Второй уровень</a:t>
             </a:r>
+            <a:endParaRPr lang="ru-RU"/>
           </a:p>
           <a:p>
             <a:pPr lvl="2"/>
@@ -543,6 +545,7 @@
               <a:rPr lang="ru-RU"/>
               <a:t>Третий уровень</a:t>
             </a:r>
+            <a:endParaRPr lang="ru-RU"/>
           </a:p>
           <a:p>
             <a:pPr lvl="3"/>
@@ -550,6 +553,7 @@
               <a:rPr lang="ru-RU"/>
               <a:t>Четвертый уровень</a:t>
             </a:r>
+            <a:endParaRPr lang="ru-RU"/>
           </a:p>
           <a:p>
             <a:pPr lvl="4"/>
@@ -557,6 +561,7 @@
               <a:rPr lang="ru-RU"/>
               <a:t>Пятый уровень</a:t>
             </a:r>
+            <a:endParaRPr lang="ru-RU"/>
           </a:p>
         </p:txBody>
       </p:sp>
@@ -577,7 +582,6 @@
           <a:p>
             <a:fld id="{C2BA13B7-D241-4424-B4BE-2E78B20DBCAC}" type="datetimeFigureOut">
               <a:rPr lang="ru-RU" smtClean="0"/>
-              <a:t>20.10.2026</a:t>
             </a:fld>
             <a:endParaRPr lang="ru-RU"/>
           </a:p>
@@ -619,7 +623,6 @@
           <a:p>
             <a:fld id="{C429094C-EE5E-46D5-9F99-8551D18087AF}" type="slidenum">
               <a:rPr lang="ru-RU" smtClean="0"/>
-              <a:t>‹#›</a:t>
             </a:fld>
             <a:endParaRPr lang="ru-RU"/>
           </a:p>
@@ -669,6 +672,7 @@
               <a:rPr lang="ru-RU"/>
               <a:t>Образец заголовка</a:t>
             </a:r>
+            <a:endParaRPr lang="ru-RU"/>
           </a:p>
         </p:txBody>
       </p:sp>
@@ -692,6 +696,7 @@
               <a:rPr lang="ru-RU"/>
               <a:t>Образец текста</a:t>
             </a:r>
+            <a:endParaRPr lang="ru-RU"/>
           </a:p>
           <a:p>
             <a:pPr lvl="1"/>
@@ -699,6 +704,7 @@
               <a:rPr lang="ru-RU"/>
               <a:t>Второй уровень</a:t>
             </a:r>
+            <a:endParaRPr lang="ru-RU"/>
           </a:p>
           <a:p>
             <a:pPr lvl="2"/>
@@ -706,6 +712,7 @@
               <a:rPr lang="ru-RU"/>
               <a:t>Третий уровень</a:t>
             </a:r>
+            <a:endParaRPr lang="ru-RU"/>
           </a:p>
           <a:p>
             <a:pPr lvl="3"/>
@@ -713,6 +720,7 @@
               <a:rPr lang="ru-RU"/>
               <a:t>Четвертый уровень</a:t>
             </a:r>
+            <a:endParaRPr lang="ru-RU"/>
           </a:p>
           <a:p>
             <a:pPr lvl="4"/>
@@ -720,6 +728,7 @@
               <a:rPr lang="ru-RU"/>
               <a:t>Пятый уровень</a:t>
             </a:r>
+            <a:endParaRPr lang="ru-RU"/>
           </a:p>
         </p:txBody>
       </p:sp>
@@ -740,7 +749,6 @@
           <a:p>
             <a:fld id="{C2BA13B7-D241-4424-B4BE-2E78B20DBCAC}" type="datetimeFigureOut">
               <a:rPr lang="ru-RU" smtClean="0"/>
-              <a:t>20.10.2026</a:t>
             </a:fld>
             <a:endParaRPr lang="ru-RU"/>
           </a:p>
@@ -782,7 +790,6 @@
           <a:p>
             <a:fld id="{C429094C-EE5E-46D5-9F99-8551D18087AF}" type="slidenum">
               <a:rPr lang="ru-RU" smtClean="0"/>
-              <a:t>‹#›</a:t>
             </a:fld>
             <a:endParaRPr lang="ru-RU"/>
           </a:p>
@@ -841,6 +848,7 @@
               <a:rPr lang="ru-RU"/>
               <a:t>Образец заголовка</a:t>
             </a:r>
+            <a:endParaRPr lang="ru-RU"/>
           </a:p>
         </p:txBody>
       </p:sp>
@@ -960,6 +968,7 @@
               <a:rPr lang="ru-RU"/>
               <a:t>Образец текста</a:t>
             </a:r>
+            <a:endParaRPr lang="ru-RU"/>
           </a:p>
         </p:txBody>
       </p:sp>
@@ -980,7 +989,6 @@
           <a:p>
             <a:fld id="{C2BA13B7-D241-4424-B4BE-2E78B20DBCAC}" type="datetimeFigureOut">
               <a:rPr lang="ru-RU" smtClean="0"/>
-              <a:t>20.10.2026</a:t>
             </a:fld>
             <a:endParaRPr lang="ru-RU"/>
           </a:p>
@@ -1022,7 +1030,6 @@
           <a:p>
             <a:fld id="{C429094C-EE5E-46D5-9F99-8551D18087AF}" type="slidenum">
               <a:rPr lang="ru-RU" smtClean="0"/>
-              <a:t>‹#›</a:t>
             </a:fld>
             <a:endParaRPr lang="ru-RU"/>
           </a:p>
@@ -1072,6 +1079,7 @@
               <a:rPr lang="ru-RU"/>
               <a:t>Образец заголовка</a:t>
             </a:r>
+            <a:endParaRPr lang="ru-RU"/>
           </a:p>
         </p:txBody>
       </p:sp>
@@ -1100,6 +1108,7 @@
               <a:rPr lang="ru-RU"/>
               <a:t>Образец текста</a:t>
             </a:r>
+            <a:endParaRPr lang="ru-RU"/>
           </a:p>
           <a:p>
             <a:pPr lvl="1"/>
@@ -1107,6 +1116,7 @@
               <a:rPr lang="ru-RU"/>
               <a:t>Второй уровень</a:t>
             </a:r>
+            <a:endParaRPr lang="ru-RU"/>
           </a:p>
           <a:p>
             <a:pPr lvl="2"/>
@@ -1114,6 +1124,7 @@
               <a:rPr lang="ru-RU"/>
               <a:t>Третий уровень</a:t>
             </a:r>
+            <a:endParaRPr lang="ru-RU"/>
           </a:p>
           <a:p>
             <a:pPr lvl="3"/>
@@ -1121,6 +1132,7 @@
               <a:rPr lang="ru-RU"/>
               <a:t>Четвертый уровень</a:t>
             </a:r>
+            <a:endParaRPr lang="ru-RU"/>
           </a:p>
           <a:p>
             <a:pPr lvl="4"/>
@@ -1128,6 +1140,7 @@
               <a:rPr lang="ru-RU"/>
               <a:t>Пятый уровень</a:t>
             </a:r>
+            <a:endParaRPr lang="ru-RU"/>
           </a:p>
         </p:txBody>
       </p:sp>
@@ -1156,6 +1169,7 @@
               <a:rPr lang="ru-RU"/>
               <a:t>Образец текста</a:t>
             </a:r>
+            <a:endParaRPr lang="ru-RU"/>
           </a:p>
           <a:p>
             <a:pPr lvl="1"/>
@@ -1163,6 +1177,7 @@
               <a:rPr lang="ru-RU"/>
               <a:t>Второй уровень</a:t>
             </a:r>
+            <a:endParaRPr lang="ru-RU"/>
           </a:p>
           <a:p>
             <a:pPr lvl="2"/>
@@ -1170,6 +1185,7 @@
               <a:rPr lang="ru-RU"/>
               <a:t>Третий уровень</a:t>
             </a:r>
+            <a:endParaRPr lang="ru-RU"/>
           </a:p>
           <a:p>
             <a:pPr lvl="3"/>
@@ -1177,6 +1193,7 @@
               <a:rPr lang="ru-RU"/>
               <a:t>Четвертый уровень</a:t>
             </a:r>
+            <a:endParaRPr lang="ru-RU"/>
           </a:p>
           <a:p>
             <a:pPr lvl="4"/>
@@ -1184,6 +1201,7 @@
               <a:rPr lang="ru-RU"/>
               <a:t>Пятый уровень</a:t>
             </a:r>
+            <a:endParaRPr lang="ru-RU"/>
           </a:p>
         </p:txBody>
       </p:sp>
@@ -1204,7 +1222,6 @@
           <a:p>
             <a:fld id="{C2BA13B7-D241-4424-B4BE-2E78B20DBCAC}" type="datetimeFigureOut">
               <a:rPr lang="ru-RU" smtClean="0"/>
-              <a:t>20.10.2026</a:t>
             </a:fld>
             <a:endParaRPr lang="ru-RU"/>
           </a:p>
@@ -1246,7 +1263,6 @@
           <a:p>
             <a:fld id="{C429094C-EE5E-46D5-9F99-8551D18087AF}" type="slidenum">
               <a:rPr lang="ru-RU" smtClean="0"/>
-              <a:t>‹#›</a:t>
             </a:fld>
             <a:endParaRPr lang="ru-RU"/>
           </a:p>
@@ -1301,6 +1317,7 @@
               <a:rPr lang="ru-RU"/>
               <a:t>Образец заголовка</a:t>
             </a:r>
+            <a:endParaRPr lang="ru-RU"/>
           </a:p>
         </p:txBody>
       </p:sp>
@@ -1366,6 +1383,7 @@
               <a:rPr lang="ru-RU"/>
               <a:t>Образец текста</a:t>
             </a:r>
+            <a:endParaRPr lang="ru-RU"/>
           </a:p>
         </p:txBody>
       </p:sp>
@@ -1394,6 +1412,7 @@
               <a:rPr lang="ru-RU"/>
               <a:t>Образец текста</a:t>
             </a:r>
+            <a:endParaRPr lang="ru-RU"/>
           </a:p>
           <a:p>
             <a:pPr lvl="1"/>
@@ -1401,6 +1420,7 @@
               <a:rPr lang="ru-RU"/>
               <a:t>Второй уровень</a:t>
             </a:r>
+            <a:endParaRPr lang="ru-RU"/>
           </a:p>
           <a:p>
             <a:pPr lvl="2"/>
@@ -1408,6 +1428,7 @@
               <a:rPr lang="ru-RU"/>
               <a:t>Третий уровень</a:t>
             </a:r>
+            <a:endParaRPr lang="ru-RU"/>
           </a:p>
           <a:p>
             <a:pPr lvl="3"/>
@@ -1415,6 +1436,7 @@
               <a:rPr lang="ru-RU"/>
               <a:t>Четвертый уровень</a:t>
             </a:r>
+            <a:endParaRPr lang="ru-RU"/>
           </a:p>
           <a:p>
             <a:pPr lvl="4"/>
@@ -1422,6 +1444,7 @@
               <a:rPr lang="ru-RU"/>
               <a:t>Пятый уровень</a:t>
             </a:r>
+            <a:endParaRPr lang="ru-RU"/>
           </a:p>
         </p:txBody>
       </p:sp>
@@ -1487,6 +1510,7 @@
               <a:rPr lang="ru-RU"/>
               <a:t>Образец текста</a:t>
             </a:r>
+            <a:endParaRPr lang="ru-RU"/>
           </a:p>
         </p:txBody>
       </p:sp>
@@ -1515,6 +1539,7 @@
               <a:rPr lang="ru-RU"/>
               <a:t>Образец текста</a:t>
             </a:r>
+            <a:endParaRPr lang="ru-RU"/>
           </a:p>
           <a:p>
             <a:pPr lvl="1"/>
@@ -1522,6 +1547,7 @@
               <a:rPr lang="ru-RU"/>
               <a:t>Второй уровень</a:t>
             </a:r>
+            <a:endParaRPr lang="ru-RU"/>
           </a:p>
           <a:p>
             <a:pPr lvl="2"/>
@@ -1529,6 +1555,7 @@
               <a:rPr lang="ru-RU"/>
               <a:t>Третий уровень</a:t>
             </a:r>
+            <a:endParaRPr lang="ru-RU"/>
           </a:p>
           <a:p>
             <a:pPr lvl="3"/>
@@ -1536,6 +1563,7 @@
               <a:rPr lang="ru-RU"/>
               <a:t>Четвертый уровень</a:t>
             </a:r>
+            <a:endParaRPr lang="ru-RU"/>
           </a:p>
           <a:p>
             <a:pPr lvl="4"/>
@@ -1543,6 +1571,7 @@
               <a:rPr lang="ru-RU"/>
               <a:t>Пятый уровень</a:t>
             </a:r>
+            <a:endParaRPr lang="ru-RU"/>
           </a:p>
         </p:txBody>
       </p:sp>
@@ -1563,7 +1592,6 @@
           <a:p>
             <a:fld id="{C2BA13B7-D241-4424-B4BE-2E78B20DBCAC}" type="datetimeFigureOut">
               <a:rPr lang="ru-RU" smtClean="0"/>
-              <a:t>20.10.2026</a:t>
             </a:fld>
             <a:endParaRPr lang="ru-RU"/>
           </a:p>
@@ -1605,7 +1633,6 @@
           <a:p>
             <a:fld id="{C429094C-EE5E-46D5-9F99-8551D18087AF}" type="slidenum">
               <a:rPr lang="ru-RU" smtClean="0"/>
-              <a:t>‹#›</a:t>
             </a:fld>
             <a:endParaRPr lang="ru-RU"/>
           </a:p>
@@ -1655,6 +1682,7 @@
               <a:rPr lang="ru-RU"/>
               <a:t>Образец заголовка</a:t>
             </a:r>
+            <a:endParaRPr lang="ru-RU"/>
           </a:p>
         </p:txBody>
       </p:sp>
@@ -1675,7 +1703,6 @@
           <a:p>
             <a:fld id="{C2BA13B7-D241-4424-B4BE-2E78B20DBCAC}" type="datetimeFigureOut">
               <a:rPr lang="ru-RU" smtClean="0"/>
-              <a:t>20.10.2026</a:t>
             </a:fld>
             <a:endParaRPr lang="ru-RU"/>
           </a:p>
@@ -1717,7 +1744,6 @@
           <a:p>
             <a:fld id="{C429094C-EE5E-46D5-9F99-8551D18087AF}" type="slidenum">
               <a:rPr lang="ru-RU" smtClean="0"/>
-              <a:t>‹#›</a:t>
             </a:fld>
             <a:endParaRPr lang="ru-RU"/>
           </a:p>
@@ -1765,7 +1791,6 @@
           <a:p>
             <a:fld id="{C2BA13B7-D241-4424-B4BE-2E78B20DBCAC}" type="datetimeFigureOut">
               <a:rPr lang="ru-RU" smtClean="0"/>
-              <a:t>20.10.2026</a:t>
             </a:fld>
             <a:endParaRPr lang="ru-RU"/>
           </a:p>
@@ -1807,7 +1832,6 @@
           <a:p>
             <a:fld id="{C429094C-EE5E-46D5-9F99-8551D18087AF}" type="slidenum">
               <a:rPr lang="ru-RU" smtClean="0"/>
-              <a:t>‹#›</a:t>
             </a:fld>
             <a:endParaRPr lang="ru-RU"/>
           </a:p>
@@ -1866,6 +1890,7 @@
               <a:rPr lang="ru-RU"/>
               <a:t>Образец заголовка</a:t>
             </a:r>
+            <a:endParaRPr lang="ru-RU"/>
           </a:p>
         </p:txBody>
       </p:sp>
@@ -1922,6 +1947,7 @@
               <a:rPr lang="ru-RU"/>
               <a:t>Образец текста</a:t>
             </a:r>
+            <a:endParaRPr lang="ru-RU"/>
           </a:p>
           <a:p>
             <a:pPr lvl="1"/>
@@ -1929,6 +1955,7 @@
               <a:rPr lang="ru-RU"/>
               <a:t>Второй уровень</a:t>
             </a:r>
+            <a:endParaRPr lang="ru-RU"/>
           </a:p>
           <a:p>
             <a:pPr lvl="2"/>
@@ -1936,6 +1963,7 @@
               <a:rPr lang="ru-RU"/>
               <a:t>Третий уровень</a:t>
             </a:r>
+            <a:endParaRPr lang="ru-RU"/>
           </a:p>
           <a:p>
             <a:pPr lvl="3"/>
@@ -1943,6 +1971,7 @@
               <a:rPr lang="ru-RU"/>
               <a:t>Четвертый уровень</a:t>
             </a:r>
+            <a:endParaRPr lang="ru-RU"/>
           </a:p>
           <a:p>
             <a:pPr lvl="4"/>
@@ -1950,6 +1979,7 @@
               <a:rPr lang="ru-RU"/>
               <a:t>Пятый уровень</a:t>
             </a:r>
+            <a:endParaRPr lang="ru-RU"/>
           </a:p>
         </p:txBody>
       </p:sp>
@@ -2015,6 +2045,7 @@
               <a:rPr lang="ru-RU"/>
               <a:t>Образец текста</a:t>
             </a:r>
+            <a:endParaRPr lang="ru-RU"/>
           </a:p>
         </p:txBody>
       </p:sp>
@@ -2035,7 +2066,6 @@
           <a:p>
             <a:fld id="{C2BA13B7-D241-4424-B4BE-2E78B20DBCAC}" type="datetimeFigureOut">
               <a:rPr lang="ru-RU" smtClean="0"/>
-              <a:t>20.10.2026</a:t>
             </a:fld>
             <a:endParaRPr lang="ru-RU"/>
           </a:p>
@@ -2077,7 +2107,6 @@
           <a:p>
             <a:fld id="{C429094C-EE5E-46D5-9F99-8551D18087AF}" type="slidenum">
               <a:rPr lang="ru-RU" smtClean="0"/>
-              <a:t>‹#›</a:t>
             </a:fld>
             <a:endParaRPr lang="ru-RU"/>
           </a:p>
@@ -2136,6 +2165,7 @@
               <a:rPr lang="ru-RU"/>
               <a:t>Образец заголовка</a:t>
             </a:r>
+            <a:endParaRPr lang="ru-RU"/>
           </a:p>
         </p:txBody>
       </p:sp>
@@ -2262,6 +2292,7 @@
               <a:rPr lang="ru-RU"/>
               <a:t>Образец текста</a:t>
             </a:r>
+            <a:endParaRPr lang="ru-RU"/>
           </a:p>
         </p:txBody>
       </p:sp>
@@ -2282,7 +2313,6 @@
           <a:p>
             <a:fld id="{C2BA13B7-D241-4424-B4BE-2E78B20DBCAC}" type="datetimeFigureOut">
               <a:rPr lang="ru-RU" smtClean="0"/>
-              <a:t>20.10.2026</a:t>
             </a:fld>
             <a:endParaRPr lang="ru-RU"/>
           </a:p>
@@ -2324,7 +2354,6 @@
           <a:p>
             <a:fld id="{C429094C-EE5E-46D5-9F99-8551D18087AF}" type="slidenum">
               <a:rPr lang="ru-RU" smtClean="0"/>
-              <a:t>‹#›</a:t>
             </a:fld>
             <a:endParaRPr lang="ru-RU"/>
           </a:p>
@@ -2389,6 +2418,7 @@
               <a:rPr lang="ru-RU"/>
               <a:t>Образец заголовка</a:t>
             </a:r>
+            <a:endParaRPr lang="ru-RU"/>
           </a:p>
         </p:txBody>
       </p:sp>
@@ -2422,6 +2452,7 @@
               <a:rPr lang="ru-RU"/>
               <a:t>Образец текста</a:t>
             </a:r>
+            <a:endParaRPr lang="ru-RU"/>
           </a:p>
           <a:p>
             <a:pPr lvl="1"/>
@@ -2429,6 +2460,7 @@
               <a:rPr lang="ru-RU"/>
               <a:t>Второй уровень</a:t>
             </a:r>
+            <a:endParaRPr lang="ru-RU"/>
           </a:p>
           <a:p>
             <a:pPr lvl="2"/>
@@ -2436,6 +2468,7 @@
               <a:rPr lang="ru-RU"/>
               <a:t>Третий уровень</a:t>
             </a:r>
+            <a:endParaRPr lang="ru-RU"/>
           </a:p>
           <a:p>
             <a:pPr lvl="3"/>
@@ -2443,6 +2476,7 @@
               <a:rPr lang="ru-RU"/>
               <a:t>Четвертый уровень</a:t>
             </a:r>
+            <a:endParaRPr lang="ru-RU"/>
           </a:p>
           <a:p>
             <a:pPr lvl="4"/>
@@ -2450,6 +2484,7 @@
               <a:rPr lang="ru-RU"/>
               <a:t>Пятый уровень</a:t>
             </a:r>
+            <a:endParaRPr lang="ru-RU"/>
           </a:p>
         </p:txBody>
       </p:sp>
@@ -2488,7 +2523,6 @@
           <a:p>
             <a:fld id="{C2BA13B7-D241-4424-B4BE-2E78B20DBCAC}" type="datetimeFigureOut">
               <a:rPr lang="ru-RU" smtClean="0"/>
-              <a:t>20.10.2026</a:t>
             </a:fld>
             <a:endParaRPr lang="ru-RU"/>
           </a:p>
@@ -2566,7 +2600,6 @@
           <a:p>
             <a:fld id="{C429094C-EE5E-46D5-9F99-8551D18087AF}" type="slidenum">
               <a:rPr lang="ru-RU" smtClean="0"/>
-              <a:t>‹#›</a:t>
             </a:fld>
             <a:endParaRPr lang="ru-RU"/>
           </a:p>
@@ -2958,15 +2991,14 @@
         <p:nvCxnSpPr>
           <p:cNvPr id="449" name="Линия эксп 449"/>
           <p:cNvCxnSpPr>
-            <a:cxnSpLocks/>
             <a:stCxn id="308" idx="2"/>
           </p:cNvCxnSpPr>
           <p:nvPr/>
         </p:nvCxnSpPr>
         <p:spPr>
           <a:xfrm>
-            <a:off x="8470900" y="4826000"/>
-            <a:ext cx="0" cy="1574800"/>
+            <a:off x="8470900" y="5207000"/>
+            <a:ext cx="0" cy="1193800"/>
           </a:xfrm>
           <a:prstGeom prst="line">
             <a:avLst/>
@@ -3470,7 +3502,7 @@
         </p:nvCxnSpPr>
         <p:spPr>
           <a:xfrm>
-            <a:off x="9321800" y="3378200"/>
+            <a:off x="9321800" y="3454400"/>
             <a:ext cx="76200" cy="0"/>
           </a:xfrm>
           <a:prstGeom prst="line">
@@ -3507,15 +3539,13 @@
       <p:cxnSp>
         <p:nvCxnSpPr>
           <p:cNvPr id="423" name="Линия 423"/>
-          <p:cNvCxnSpPr>
-            <a:cxnSpLocks/>
-          </p:cNvCxnSpPr>
+          <p:cNvCxnSpPr/>
           <p:nvPr/>
         </p:nvCxnSpPr>
         <p:spPr>
           <a:xfrm>
             <a:off x="9398000" y="2616200"/>
-            <a:ext cx="0" cy="1955800"/>
+            <a:ext cx="0" cy="2260600"/>
           </a:xfrm>
           <a:prstGeom prst="line">
             <a:avLst/>
@@ -3998,7 +4028,7 @@
           <p:nvPr/>
         </p:nvPicPr>
         <p:blipFill>
-          <a:blip r:embed="rId2">
+          <a:blip r:embed="rId1">
             <a:extLst>
               <a:ext uri="{28A0092B-C50C-407E-A947-70E740481C1C}">
                 <a14:useLocalDpi xmlns:a14="http://schemas.microsoft.com/office/drawing/2010/main" val="0"/>
@@ -4113,6 +4143,12 @@
               </a:rPr>
               <a:t>Верховный Попечитель</a:t>
             </a:r>
+            <a:endParaRPr lang="ru-RU" sz="1000" b="1" dirty="0">
+              <a:solidFill>
+                <a:srgbClr val="FFFFFF"/>
+              </a:solidFill>
+              <a:latin typeface="Segoe UI" panose="020B0502040204020203" pitchFamily="34" charset="0"/>
+            </a:endParaRPr>
           </a:p>
         </p:txBody>
       </p:sp>
@@ -4159,6 +4195,12 @@
               </a:rPr>
               <a:t>Главный исполнительный директор (ГИД)</a:t>
             </a:r>
+            <a:endParaRPr lang="ru-RU" sz="1000" b="1" dirty="0">
+              <a:solidFill>
+                <a:srgbClr val="FFFFFF"/>
+              </a:solidFill>
+              <a:latin typeface="Segoe UI" panose="020B0502040204020203" pitchFamily="34" charset="0"/>
+            </a:endParaRPr>
           </a:p>
           <a:p>
             <a:pPr algn="ctr">
@@ -4175,6 +4217,12 @@
               </a:rPr>
               <a:t>Қаражан Е.Н.</a:t>
             </a:r>
+            <a:endParaRPr lang="ru-RU" sz="1000" b="1" dirty="0">
+              <a:solidFill>
+                <a:srgbClr val="FFFFFF"/>
+              </a:solidFill>
+              <a:latin typeface="Segoe UI" panose="020B0502040204020203" pitchFamily="34" charset="0"/>
+            </a:endParaRPr>
           </a:p>
         </p:txBody>
       </p:sp>
@@ -4304,6 +4352,12 @@
               </a:rPr>
               <a:t>Зам. ГИД (адм.-хоз. вопросы,</a:t>
             </a:r>
+            <a:endParaRPr lang="ru-RU" sz="900" dirty="0">
+              <a:solidFill>
+                <a:srgbClr val="1F3864"/>
+              </a:solidFill>
+              <a:latin typeface="Segoe UI" panose="020B0502040204020203" pitchFamily="34" charset="0"/>
+            </a:endParaRPr>
           </a:p>
           <a:p>
             <a:pPr algn="ctr">
@@ -4320,6 +4374,12 @@
               </a:rPr>
               <a:t>закупки, кадры, проекты)</a:t>
             </a:r>
+            <a:endParaRPr lang="ru-RU" sz="900" dirty="0">
+              <a:solidFill>
+                <a:srgbClr val="1F3864"/>
+              </a:solidFill>
+              <a:latin typeface="Segoe UI" panose="020B0502040204020203" pitchFamily="34" charset="0"/>
+            </a:endParaRPr>
           </a:p>
           <a:p>
             <a:pPr algn="ctr">
@@ -4400,6 +4460,12 @@
               </a:rPr>
               <a:t>Финансовый директор</a:t>
             </a:r>
+            <a:endParaRPr lang="ru-RU" sz="900" dirty="0">
+              <a:solidFill>
+                <a:srgbClr val="1F3864"/>
+              </a:solidFill>
+              <a:latin typeface="Segoe UI" panose="020B0502040204020203" pitchFamily="34" charset="0"/>
+            </a:endParaRPr>
           </a:p>
           <a:p>
             <a:pPr algn="ctr">
@@ -4481,6 +4547,12 @@
               </a:rPr>
               <a:t>Бухгалтер</a:t>
             </a:r>
+            <a:endParaRPr lang="ru-RU" sz="900" dirty="0">
+              <a:solidFill>
+                <a:srgbClr val="787878"/>
+              </a:solidFill>
+              <a:latin typeface="Segoe UI" panose="020B0502040204020203" pitchFamily="34" charset="0"/>
+            </a:endParaRPr>
           </a:p>
           <a:p>
             <a:pPr algn="ctr">
@@ -4523,8 +4595,8 @@
         </p:nvSpPr>
         <p:spPr>
           <a:xfrm>
-            <a:off x="4724400" y="1270000"/>
-            <a:ext cx="2768600" cy="279400"/>
+            <a:off x="4724400" y="1078230"/>
+            <a:ext cx="2768600" cy="471170"/>
           </a:xfrm>
           <a:prstGeom prst="roundRect">
             <a:avLst>
@@ -4558,6 +4630,12 @@
               </a:rPr>
               <a:t>Национальный координатор</a:t>
             </a:r>
+            <a:endParaRPr lang="ru-RU" sz="1000" b="1" dirty="0">
+              <a:solidFill>
+                <a:srgbClr val="FFFFFF"/>
+              </a:solidFill>
+              <a:latin typeface="Segoe UI" panose="020B0502040204020203" pitchFamily="34" charset="0"/>
+            </a:endParaRPr>
           </a:p>
         </p:txBody>
       </p:sp>
@@ -4665,6 +4743,12 @@
               </a:rPr>
               <a:t>Цифровое развитие (1)</a:t>
             </a:r>
+            <a:endParaRPr lang="ru-RU" sz="1000" b="1" dirty="0">
+              <a:solidFill>
+                <a:srgbClr val="FFFFFF"/>
+              </a:solidFill>
+              <a:latin typeface="Segoe UI" panose="020B0502040204020203" pitchFamily="34" charset="0"/>
+            </a:endParaRPr>
           </a:p>
         </p:txBody>
       </p:sp>
@@ -5101,7 +5185,7 @@
               <a:t>рук. — </a:t>
             </a:r>
             <a:r>
-              <a:rPr lang="kk-KZ" sz="1000" b="1" dirty="0">
+              <a:rPr lang="en-US" sz="1000" b="1" dirty="0">
                 <a:solidFill>
                   <a:srgbClr val="1F3864"/>
                 </a:solidFill>
@@ -5116,7 +5200,7 @@
                 </a:solidFill>
                 <a:latin typeface="Segoe UI" panose="020B0502040204020203" pitchFamily="34" charset="0"/>
               </a:rPr>
-              <a:t> C.</a:t>
+              <a:t> С.</a:t>
             </a:r>
             <a:br>
               <a:rPr lang="ru-RU" sz="900" b="0" dirty="0">
@@ -5187,6 +5271,12 @@
               </a:rPr>
               <a:t>Гл. специалист, социолог</a:t>
             </a:r>
+            <a:endParaRPr lang="ru-RU" sz="1000" dirty="0">
+              <a:solidFill>
+                <a:srgbClr val="464646"/>
+              </a:solidFill>
+              <a:latin typeface="Segoe UI" panose="020B0502040204020203" pitchFamily="34" charset="0"/>
+            </a:endParaRPr>
           </a:p>
           <a:p>
             <a:pPr algn="ctr">
@@ -5391,7 +5481,7 @@
               <a:t>(</a:t>
             </a:r>
             <a:r>
-              <a:rPr lang="kk-KZ" sz="1000" dirty="0" err="1">
+              <a:rPr lang="en-US" sz="1000" dirty="0" err="1">
                 <a:solidFill>
                   <a:srgbClr val="464646"/>
                 </a:solidFill>
@@ -5577,6 +5667,12 @@
               </a:rPr>
               <a:t>Главный специалист</a:t>
             </a:r>
+            <a:endParaRPr lang="ru-RU" sz="1000" dirty="0">
+              <a:solidFill>
+                <a:srgbClr val="464646"/>
+              </a:solidFill>
+              <a:latin typeface="Segoe UI" panose="020B0502040204020203" pitchFamily="34" charset="0"/>
+            </a:endParaRPr>
           </a:p>
           <a:p>
             <a:pPr algn="ctr">
@@ -5628,7 +5724,10 @@
             </a:avLst>
           </a:prstGeom>
           <a:solidFill>
-            <a:srgbClr val="E7DFF3"/>
+            <a:schemeClr val="accent2">
+              <a:lumMod val="20000"/>
+              <a:lumOff val="80000"/>
+            </a:schemeClr>
           </a:solidFill>
           <a:ln w="12700">
             <a:solidFill>
@@ -5689,7 +5788,7 @@
                 </a:solidFill>
                 <a:latin typeface="Segoe UI" panose="020B0502040204020203" pitchFamily="34" charset="0"/>
               </a:rPr>
-              <a:t>: </a:t>
+              <a:t>. </a:t>
             </a:r>
             <a:r>
               <a:rPr lang="ru-RU" sz="900" b="0" dirty="0">
@@ -5752,6 +5851,12 @@
               </a:rPr>
               <a:t>Главный специалист</a:t>
             </a:r>
+            <a:endParaRPr lang="ru-RU" sz="1000" dirty="0">
+              <a:solidFill>
+                <a:srgbClr val="464646"/>
+              </a:solidFill>
+              <a:latin typeface="Segoe UI" panose="020B0502040204020203" pitchFamily="34" charset="0"/>
+            </a:endParaRPr>
           </a:p>
           <a:p>
             <a:pPr algn="ctr">
@@ -5829,6 +5934,12 @@
               </a:rPr>
               <a:t>Ведущий специалист</a:t>
             </a:r>
+            <a:endParaRPr lang="ru-RU" sz="1000" dirty="0">
+              <a:solidFill>
+                <a:srgbClr val="464646"/>
+              </a:solidFill>
+              <a:latin typeface="Segoe UI" panose="020B0502040204020203" pitchFamily="34" charset="0"/>
+            </a:endParaRPr>
           </a:p>
           <a:p>
             <a:pPr algn="ctr">
@@ -5906,6 +6017,12 @@
               </a:rPr>
               <a:t>Ведущий специалист</a:t>
             </a:r>
+            <a:endParaRPr lang="ru-RU" sz="1000" dirty="0">
+              <a:solidFill>
+                <a:srgbClr val="464646"/>
+              </a:solidFill>
+              <a:latin typeface="Segoe UI" panose="020B0502040204020203" pitchFamily="34" charset="0"/>
+            </a:endParaRPr>
           </a:p>
           <a:p>
             <a:pPr algn="ctr">
@@ -5975,7 +6092,10 @@
             </a:avLst>
           </a:prstGeom>
           <a:solidFill>
-            <a:srgbClr val="E7DFF3"/>
+            <a:schemeClr val="accent2">
+              <a:lumMod val="20000"/>
+              <a:lumOff val="80000"/>
+            </a:schemeClr>
           </a:solidFill>
           <a:ln w="12700">
             <a:solidFill>
@@ -6164,6 +6284,12 @@
               </a:rPr>
               <a:t>Гл. специалист, PR — пресс-секретарь</a:t>
             </a:r>
+            <a:endParaRPr lang="ru-RU" sz="1000" dirty="0">
+              <a:solidFill>
+                <a:srgbClr val="464646"/>
+              </a:solidFill>
+              <a:latin typeface="Segoe UI" panose="020B0502040204020203" pitchFamily="34" charset="0"/>
+            </a:endParaRPr>
           </a:p>
           <a:p>
             <a:pPr algn="ctr">
@@ -6241,6 +6367,12 @@
               </a:rPr>
               <a:t>Вед. специалист, фотограф-рилсмейкер</a:t>
             </a:r>
+            <a:endParaRPr lang="ru-RU" sz="1000" dirty="0">
+              <a:solidFill>
+                <a:srgbClr val="464646"/>
+              </a:solidFill>
+              <a:latin typeface="Segoe UI" panose="020B0502040204020203" pitchFamily="34" charset="0"/>
+            </a:endParaRPr>
           </a:p>
           <a:p>
             <a:pPr algn="ctr">
@@ -6264,7 +6396,7 @@
                 </a:solidFill>
                 <a:latin typeface="Segoe UI" panose="020B0502040204020203" pitchFamily="34" charset="0"/>
               </a:rPr>
-              <a:t> Б,</a:t>
+              <a:t> Б.</a:t>
             </a:r>
             <a:r>
               <a:rPr lang="ru-RU" sz="900" b="0" dirty="0">
@@ -6327,6 +6459,12 @@
               </a:rPr>
               <a:t>Вед. специалист, менеджер по блогерам</a:t>
             </a:r>
+            <a:endParaRPr lang="ru-RU" sz="1000" dirty="0">
+              <a:solidFill>
+                <a:srgbClr val="464646"/>
+              </a:solidFill>
+              <a:latin typeface="Segoe UI" panose="020B0502040204020203" pitchFamily="34" charset="0"/>
+            </a:endParaRPr>
           </a:p>
           <a:p>
             <a:pPr algn="ctr">
@@ -6507,7 +6645,6 @@
               <a:lumOff val="80000"/>
             </a:schemeClr>
           </a:solidFill>
-          <a:ln/>
         </p:spPr>
         <p:style>
           <a:lnRef idx="2">
@@ -6542,7 +6679,7 @@
               <a:t>Вед. специалист, </a:t>
             </a:r>
             <a:r>
-              <a:rPr lang="kk-KZ" sz="1000" dirty="0">
+              <a:rPr lang="en-US" sz="1000" dirty="0">
                 <a:solidFill>
                   <a:srgbClr val="464646"/>
                 </a:solidFill>
@@ -6704,6 +6841,12 @@
               </a:rPr>
               <a:t>30</a:t>
             </a:r>
+            <a:endParaRPr lang="ru-RU" sz="1000" b="1" dirty="0">
+              <a:solidFill>
+                <a:srgbClr val="FF0000"/>
+              </a:solidFill>
+              <a:latin typeface="Segoe UI" panose="020B0502040204020203" pitchFamily="34" charset="0"/>
+            </a:endParaRPr>
           </a:p>
           <a:p>
             <a:pPr algn="ctr">
@@ -6720,6 +6863,12 @@
               </a:rPr>
               <a:t>ЦАКФ и проектный офис</a:t>
             </a:r>
+            <a:endParaRPr lang="ru-RU" sz="1000" b="1" dirty="0">
+              <a:solidFill>
+                <a:srgbClr val="1F3864"/>
+              </a:solidFill>
+              <a:latin typeface="Segoe UI" panose="020B0502040204020203" pitchFamily="34" charset="0"/>
+            </a:endParaRPr>
           </a:p>
           <a:p>
             <a:pPr algn="ctr">
@@ -6758,6 +6907,12 @@
               </a:rPr>
               <a:t>аутсорс — 7 позиций</a:t>
             </a:r>
+            <a:endParaRPr lang="ru-RU" sz="900" b="1" dirty="0">
+              <a:solidFill>
+                <a:srgbClr val="7F6000"/>
+              </a:solidFill>
+              <a:latin typeface="Segoe UI" panose="020B0502040204020203" pitchFamily="34" charset="0"/>
+            </a:endParaRPr>
           </a:p>
         </p:txBody>
       </p:sp>
@@ -6882,8 +7037,8 @@
         </p:nvSpPr>
         <p:spPr>
           <a:xfrm>
-            <a:off x="7620000" y="4318000"/>
-            <a:ext cx="1701800" cy="508000"/>
+            <a:off x="7620000" y="4546600"/>
+            <a:ext cx="1701800" cy="660400"/>
           </a:xfrm>
           <a:prstGeom prst="roundRect">
             <a:avLst>
@@ -6910,13 +7065,24 @@
               </a:lnSpc>
             </a:pPr>
             <a:r>
+              <a:rPr lang="ru-RU" sz="900">
+                <a:solidFill>
+                  <a:srgbClr val="464646"/>
+                </a:solidFill>
+                <a:latin typeface="Segoe UI" panose="020B0502040204020203" pitchFamily="34" charset="0"/>
+                <a:sym typeface="+mn-ea"/>
+              </a:rPr>
+              <a:t>Менеджер проектов</a:t>
+            </a:r>
+            <a:r>
               <a:rPr lang="ru-RU" sz="900" dirty="0">
                 <a:solidFill>
-                  <a:srgbClr val="787878"/>
-                </a:solidFill>
-                <a:latin typeface="Segoe UI" panose="020B0502040204020203" pitchFamily="34" charset="0"/>
-              </a:rPr>
-              <a:t>Эксперт по отходам/воде/воздуху</a:t>
+                  <a:srgbClr val="464646"/>
+                </a:solidFill>
+                <a:latin typeface="Segoe UI" panose="020B0502040204020203" pitchFamily="34" charset="0"/>
+                <a:sym typeface="+mn-ea"/>
+              </a:rPr>
+              <a:t> – эколог</a:t>
             </a:r>
             <a:endParaRPr lang="ru-RU" sz="900" dirty="0">
               <a:solidFill>
@@ -6932,6 +7098,28 @@
               </a:lnSpc>
             </a:pPr>
             <a:r>
+              <a:rPr lang="ru-RU" sz="900" dirty="0">
+                <a:solidFill>
+                  <a:srgbClr val="787878"/>
+                </a:solidFill>
+                <a:latin typeface="Segoe UI" panose="020B0502040204020203" pitchFamily="34" charset="0"/>
+              </a:rPr>
+              <a:t>(отходы, вода, воздух)</a:t>
+            </a:r>
+            <a:endParaRPr lang="ru-RU" sz="900" dirty="0">
+              <a:solidFill>
+                <a:srgbClr val="464646"/>
+              </a:solidFill>
+              <a:latin typeface="Segoe UI" panose="020B0502040204020203" pitchFamily="34" charset="0"/>
+            </a:endParaRPr>
+          </a:p>
+          <a:p>
+            <a:pPr algn="ctr">
+              <a:lnSpc>
+                <a:spcPct val="90000"/>
+              </a:lnSpc>
+            </a:pPr>
+            <a:r>
               <a:rPr lang="ru-RU" sz="900" b="0" i="1" dirty="0">
                 <a:solidFill>
                   <a:srgbClr val="787878"/>
@@ -6967,7 +7155,7 @@
         <p:spPr>
           <a:xfrm>
             <a:off x="7620000" y="3124200"/>
-            <a:ext cx="1701800" cy="508000"/>
+            <a:ext cx="1701800" cy="660400"/>
           </a:xfrm>
           <a:prstGeom prst="roundRect">
             <a:avLst>
@@ -6993,14 +7181,30 @@
               </a:lnSpc>
             </a:pPr>
             <a:r>
+              <a:rPr lang="ru-RU" sz="1000">
+                <a:solidFill>
+                  <a:srgbClr val="464646"/>
+                </a:solidFill>
+                <a:latin typeface="Segoe UI" panose="020B0502040204020203" pitchFamily="34" charset="0"/>
+                <a:sym typeface="+mn-ea"/>
+              </a:rPr>
+              <a:t>Менеджер проектов</a:t>
+            </a:r>
+            <a:r>
               <a:rPr lang="ru-RU" sz="1000" dirty="0">
                 <a:solidFill>
                   <a:srgbClr val="464646"/>
                 </a:solidFill>
                 <a:latin typeface="Segoe UI" panose="020B0502040204020203" pitchFamily="34" charset="0"/>
               </a:rPr>
-              <a:t>Эксперт-эколог</a:t>
-            </a:r>
+              <a:t> – эколог</a:t>
+            </a:r>
+            <a:endParaRPr lang="ru-RU" sz="1000" dirty="0">
+              <a:solidFill>
+                <a:srgbClr val="464646"/>
+              </a:solidFill>
+              <a:latin typeface="Segoe UI" panose="020B0502040204020203" pitchFamily="34" charset="0"/>
+            </a:endParaRPr>
           </a:p>
           <a:p>
             <a:pPr algn="ctr">
@@ -7051,8 +7255,8 @@
         </p:nvSpPr>
         <p:spPr>
           <a:xfrm>
-            <a:off x="7620000" y="3721100"/>
-            <a:ext cx="1701800" cy="508000"/>
+            <a:off x="7620000" y="3835400"/>
+            <a:ext cx="1701800" cy="660400"/>
           </a:xfrm>
           <a:prstGeom prst="roundRect">
             <a:avLst>
@@ -7078,14 +7282,31 @@
               </a:lnSpc>
             </a:pPr>
             <a:r>
+              <a:rPr lang="ru-RU" sz="1000">
+                <a:solidFill>
+                  <a:srgbClr val="464646"/>
+                </a:solidFill>
+                <a:latin typeface="Segoe UI" panose="020B0502040204020203" pitchFamily="34" charset="0"/>
+                <a:sym typeface="+mn-ea"/>
+              </a:rPr>
+              <a:t>Менеджер проектов</a:t>
+            </a:r>
+            <a:r>
               <a:rPr lang="ru-RU" sz="1000" dirty="0">
                 <a:solidFill>
                   <a:srgbClr val="464646"/>
                 </a:solidFill>
                 <a:latin typeface="Segoe UI" panose="020B0502040204020203" pitchFamily="34" charset="0"/>
-              </a:rPr>
-              <a:t>Эксперт</a:t>
-            </a:r>
+                <a:sym typeface="+mn-ea"/>
+              </a:rPr>
+              <a:t> – эколог</a:t>
+            </a:r>
+            <a:endParaRPr lang="ru-RU" sz="1000" dirty="0">
+              <a:solidFill>
+                <a:srgbClr val="464646"/>
+              </a:solidFill>
+              <a:latin typeface="Segoe UI" panose="020B0502040204020203" pitchFamily="34" charset="0"/>
+            </a:endParaRPr>
           </a:p>
           <a:p>
             <a:pPr algn="ctr">
@@ -7312,6 +7533,12 @@
               </a:rPr>
               <a:t>приход в 2027 году</a:t>
             </a:r>
+            <a:endParaRPr lang="ru-RU" sz="900" dirty="0">
+              <a:solidFill>
+                <a:srgbClr val="464646"/>
+              </a:solidFill>
+              <a:latin typeface="Segoe UI" panose="020B0502040204020203" pitchFamily="34" charset="0"/>
+            </a:endParaRPr>
           </a:p>
         </p:txBody>
       </p:sp>
@@ -7390,6 +7617,12 @@
               </a:rPr>
               <a:t>всего в 2027 году 30 чел.</a:t>
             </a:r>
+            <a:endParaRPr lang="ru-RU" sz="1000" b="1" dirty="0">
+              <a:solidFill>
+                <a:srgbClr val="C00000"/>
+              </a:solidFill>
+              <a:latin typeface="Segoe UI" panose="020B0502040204020203" pitchFamily="34" charset="0"/>
+            </a:endParaRPr>
           </a:p>
         </p:txBody>
       </p:sp>
@@ -7434,7 +7667,7 @@
                 </a:solidFill>
                 <a:latin typeface="Segoe UI" panose="020B0502040204020203" pitchFamily="34" charset="0"/>
               </a:rPr>
-              <a:t>Менеджер проектов</a:t>
+              <a:t>Зам. руководителя ПО</a:t>
             </a:r>
             <a:br>
               <a:rPr lang="ru-RU" sz="1000">
@@ -7569,6 +7802,12 @@
               </a:rPr>
               <a:t>Проектный офис для Центральной Азии по изменению климата и зеленой энергетике (4)</a:t>
             </a:r>
+            <a:endParaRPr lang="ru-RU" sz="750" b="1">
+              <a:solidFill>
+                <a:srgbClr val="FFFFFF"/>
+              </a:solidFill>
+              <a:latin typeface="Segoe UI" panose="020B0502040204020203" pitchFamily="34" charset="0"/>
+            </a:endParaRPr>
           </a:p>
         </p:txBody>
       </p:sp>
@@ -7623,15 +7862,6 @@
                 <a:latin typeface="Segoe UI" panose="020B0502040204020203" pitchFamily="34" charset="0"/>
               </a:rPr>
               <a:t>ГИД Қаражан Е.Н.</a:t>
-            </a:r>
-            <a:r>
-              <a:rPr lang="ru-RU" sz="900" b="0" dirty="0">
-                <a:solidFill>
-                  <a:srgbClr val="227838"/>
-                </a:solidFill>
-                <a:latin typeface="Segoe UI" panose="020B0502040204020203" pitchFamily="34" charset="0"/>
-              </a:rPr>
-              <a:t/>
             </a:r>
             <a:endParaRPr lang="ru-RU" sz="1100" b="1" dirty="0">
               <a:solidFill>
@@ -7705,13 +7935,7 @@
       </p:sp>
       <p:sp>
         <p:nvSpPr>
-          <p:cNvPr id="2" name="Легенда 2027">
-            <a:extLst>
-              <a:ext uri="{FF2B5EF4-FFF2-40B4-BE49-F238E27FC236}">
-                <a16:creationId xmlns:a16="http://schemas.microsoft.com/office/drawing/2014/main" id="{336AD273-53A0-C6AA-7461-B3A96422AB21}"/>
-              </a:ext>
-            </a:extLst>
-          </p:cNvPr>
+          <p:cNvPr id="2" name="Легенда 2027"/>
           <p:cNvSpPr/>
           <p:nvPr/>
         </p:nvSpPr>
@@ -7745,13 +7969,7 @@
       </p:sp>
       <p:sp>
         <p:nvSpPr>
-          <p:cNvPr id="5" name="Легенда 2027 текст">
-            <a:extLst>
-              <a:ext uri="{FF2B5EF4-FFF2-40B4-BE49-F238E27FC236}">
-                <a16:creationId xmlns:a16="http://schemas.microsoft.com/office/drawing/2014/main" id="{7C366BE1-F4BC-1023-D5D7-017BFC9E40A2}"/>
-              </a:ext>
-            </a:extLst>
-          </p:cNvPr>
+          <p:cNvPr id="5" name="Легенда 2027 текст"/>
           <p:cNvSpPr txBox="1"/>
           <p:nvPr/>
         </p:nvSpPr>
@@ -7778,24 +7996,24 @@
               </a:rPr>
               <a:t>приход в декабре 2026 года</a:t>
             </a:r>
+            <a:endParaRPr lang="ru-RU" sz="900" dirty="0">
+              <a:solidFill>
+                <a:srgbClr val="464646"/>
+              </a:solidFill>
+              <a:latin typeface="Segoe UI" panose="020B0502040204020203" pitchFamily="34" charset="0"/>
+            </a:endParaRPr>
           </a:p>
         </p:txBody>
       </p:sp>
       <p:cxnSp>
         <p:nvCxnSpPr>
-          <p:cNvPr id="12" name="Линия 425">
-            <a:extLst>
-              <a:ext uri="{FF2B5EF4-FFF2-40B4-BE49-F238E27FC236}">
-                <a16:creationId xmlns:a16="http://schemas.microsoft.com/office/drawing/2014/main" id="{AD76B413-4769-5E41-CC9B-90090C0E5C57}"/>
-              </a:ext>
-            </a:extLst>
-          </p:cNvPr>
+          <p:cNvPr id="12" name="Линия 425"/>
           <p:cNvCxnSpPr/>
           <p:nvPr/>
         </p:nvCxnSpPr>
         <p:spPr>
           <a:xfrm>
-            <a:off x="9321800" y="4572000"/>
+            <a:off x="9321800" y="4876800"/>
             <a:ext cx="76200" cy="0"/>
           </a:xfrm>
           <a:prstGeom prst="line">
@@ -7810,19 +8028,13 @@
       </p:cxnSp>
       <p:cxnSp>
         <p:nvCxnSpPr>
-          <p:cNvPr id="462" name="Линия Абулхан">
-            <a:extLst>
-              <a:ext uri="{FF2B5EF4-FFF2-40B4-BE49-F238E27FC236}">
-                <a16:creationId xmlns:a16="http://schemas.microsoft.com/office/drawing/2014/main" id="{AD76B413-4769-5E41-CC9B-90090C0E5C57}"/>
-              </a:ext>
-            </a:extLst>
-          </p:cNvPr>
+          <p:cNvPr id="462" name="Линия Абулхан"/>
           <p:cNvCxnSpPr/>
           <p:nvPr/>
         </p:nvCxnSpPr>
         <p:spPr>
           <a:xfrm>
-            <a:off x="9321800" y="3975100"/>
+            <a:off x="9321800" y="4165600"/>
             <a:ext cx="76200" cy="0"/>
           </a:xfrm>
           <a:prstGeom prst="line">
@@ -8094,8 +8306,6 @@
       </a:bgFillStyleLst>
     </a:fmtScheme>
   </a:themeElements>
-  <a:objectDefaults/>
-  <a:extraClrSchemeLst/>
   <a:extLst>
     <a:ext uri="{05A4C25C-085E-4340-85A3-A5531E510DB2}">
       <thm15:themeFamily xmlns:thm15="http://schemas.microsoft.com/office/thememl/2012/main" name="Office Theme" id="{62F939B6-93AF-4DB8-9C6B-D6C7DFDC589F}" vid="{4A3C46E8-61CC-4603-A589-7422A47A8E4A}"/>

--- a/TAZA/_документы/Структура ЦАКФ и проектного офиса ТК – от Айгерим 20.10.pptx
+++ b/TAZA/_документы/Структура ЦАКФ и проектного офиса ТК – от Айгерим 20.10.pptx
@@ -4899,14 +4899,11 @@
             </a:avLst>
           </a:prstGeom>
           <a:solidFill>
-            <a:schemeClr val="accent2">
-              <a:lumMod val="20000"/>
-              <a:lumOff val="80000"/>
-            </a:schemeClr>
+            <a:srgbClr val="E9F3EA"/>
           </a:solidFill>
           <a:ln w="12700">
             <a:solidFill>
-              <a:schemeClr val="tx1"/>
+              <a:srgbClr val="227838"/>
             </a:solidFill>
           </a:ln>
         </p:spPr>

--- a/TAZA/_документы/Структура ЦАКФ и проектного офиса ТК – от Айгерим 20.10.pptx
+++ b/TAZA/_документы/Структура ЦАКФ и проектного офиса ТК – от Айгерим 20.10.pptx
@@ -2997,8 +2997,8 @@
         </p:nvCxnSpPr>
         <p:spPr>
           <a:xfrm>
-            <a:off x="8470900" y="5207000"/>
-            <a:ext cx="0" cy="1193800"/>
+            <a:off x="8470900" y="4495800"/>
+            <a:ext cx="0" cy="1905000"/>
           </a:xfrm>
           <a:prstGeom prst="line">
             <a:avLst/>
@@ -3502,7 +3502,7 @@
         </p:nvCxnSpPr>
         <p:spPr>
           <a:xfrm>
-            <a:off x="9321800" y="3454400"/>
+            <a:off x="9321800" y="3314700"/>
             <a:ext cx="76200" cy="0"/>
           </a:xfrm>
           <a:prstGeom prst="line">
@@ -3545,7 +3545,7 @@
         <p:spPr>
           <a:xfrm>
             <a:off x="9398000" y="2616200"/>
-            <a:ext cx="0" cy="2260600"/>
+            <a:ext cx="0" cy="1625600"/>
           </a:xfrm>
           <a:prstGeom prst="line">
             <a:avLst/>
@@ -4899,11 +4899,14 @@
             </a:avLst>
           </a:prstGeom>
           <a:solidFill>
-            <a:srgbClr val="E9F3EA"/>
+            <a:schemeClr val="accent2">
+              <a:lumMod val="20000"/>
+              <a:lumOff val="80000"/>
+            </a:schemeClr>
           </a:solidFill>
           <a:ln w="12700">
             <a:solidFill>
-              <a:srgbClr val="227838"/>
+              <a:schemeClr val="tx1"/>
             </a:solidFill>
           </a:ln>
         </p:spPr>
@@ -5721,10 +5724,7 @@
             </a:avLst>
           </a:prstGeom>
           <a:solidFill>
-            <a:schemeClr val="accent2">
-              <a:lumMod val="20000"/>
-              <a:lumOff val="80000"/>
-            </a:schemeClr>
+            <a:srgbClr val="E7DFF3"/>
           </a:solidFill>
           <a:ln w="12700">
             <a:solidFill>
@@ -6089,10 +6089,7 @@
             </a:avLst>
           </a:prstGeom>
           <a:solidFill>
-            <a:schemeClr val="accent2">
-              <a:lumMod val="20000"/>
-              <a:lumOff val="80000"/>
-            </a:schemeClr>
+            <a:srgbClr val="E7DFF3"/>
           </a:solidFill>
           <a:ln w="12700">
             <a:solidFill>
@@ -6880,7 +6877,7 @@
                 </a:solidFill>
                 <a:latin typeface="Segoe UI" panose="020B0502040204020203" pitchFamily="34" charset="0"/>
               </a:rPr>
-              <a:t>нояб. 2026 — 23, дек. — +2, 2027 — +5</a:t>
+              <a:t>нояб. 2026 — 22, дек. — +1, 2027 — +7</a:t>
             </a:r>
             <a:endParaRPr lang="ru-RU" sz="800" i="1" dirty="0">
               <a:solidFill>
@@ -7034,8 +7031,8 @@
         </p:nvSpPr>
         <p:spPr>
           <a:xfrm>
-            <a:off x="7620000" y="4546600"/>
-            <a:ext cx="1701800" cy="660400"/>
+            <a:off x="7620000" y="3987800"/>
+            <a:ext cx="1701800" cy="508000"/>
           </a:xfrm>
           <a:prstGeom prst="roundRect">
             <a:avLst>
@@ -7053,7 +7050,7 @@
           </a:ln>
         </p:spPr>
         <p:txBody>
-          <a:bodyPr lIns="50800" tIns="12700" rIns="50800" bIns="12700" rtlCol="0" anchor="ctr"/>
+          <a:bodyPr lIns="25400" tIns="12700" rIns="25400" bIns="12700" rtlCol="0" anchor="ctr"/>
           <a:lstStyle/>
           <a:p>
             <a:pPr algn="ctr">
@@ -7152,7 +7149,7 @@
         <p:spPr>
           <a:xfrm>
             <a:off x="7620000" y="3124200"/>
-            <a:ext cx="1701800" cy="660400"/>
+            <a:ext cx="1701800" cy="381000"/>
           </a:xfrm>
           <a:prstGeom prst="roundRect">
             <a:avLst>
@@ -7169,7 +7166,7 @@
           </a:ln>
         </p:spPr>
         <p:txBody>
-          <a:bodyPr lIns="50800" tIns="12700" rIns="50800" bIns="12700" rtlCol="0" anchor="ctr"/>
+          <a:bodyPr lIns="25400" tIns="12700" rIns="25400" bIns="12700" rtlCol="0" anchor="ctr"/>
           <a:lstStyle/>
           <a:p>
             <a:pPr algn="ctr">
@@ -7178,7 +7175,7 @@
               </a:lnSpc>
             </a:pPr>
             <a:r>
-              <a:rPr lang="ru-RU" sz="1000">
+              <a:rPr lang="ru-RU" sz="900">
                 <a:solidFill>
                   <a:srgbClr val="464646"/>
                 </a:solidFill>
@@ -7188,7 +7185,7 @@
               <a:t>Менеджер проектов</a:t>
             </a:r>
             <a:r>
-              <a:rPr lang="ru-RU" sz="1000" dirty="0">
+              <a:rPr lang="ru-RU" sz="900" dirty="0">
                 <a:solidFill>
                   <a:srgbClr val="464646"/>
                 </a:solidFill>
@@ -7216,24 +7213,16 @@
                 </a:solidFill>
                 <a:latin typeface="Segoe UI" panose="020B0502040204020203" pitchFamily="34" charset="0"/>
               </a:rPr>
-              <a:t>Загирова Анастасия</a:t>
-            </a:r>
-            <a:br>
+              <a:t>Загирова А.</a:t>
+            </a:r>
+            <a:r>
               <a:rPr lang="ru-RU" sz="900" b="0" dirty="0">
                 <a:solidFill>
                   <a:srgbClr val="227838"/>
                 </a:solidFill>
                 <a:latin typeface="Segoe UI" panose="020B0502040204020203" pitchFamily="34" charset="0"/>
               </a:rPr>
-            </a:br>
-            <a:r>
-              <a:rPr lang="ru-RU" sz="900" b="0" dirty="0">
-                <a:solidFill>
-                  <a:srgbClr val="227838"/>
-                </a:solidFill>
-                <a:latin typeface="Segoe UI" panose="020B0502040204020203" pitchFamily="34" charset="0"/>
-              </a:rPr>
-              <a:t>615 000</a:t>
+              <a:t> · 615 000</a:t>
             </a:r>
             <a:endParaRPr lang="ru-RU" sz="1100" b="1" dirty="0">
               <a:solidFill>
@@ -7252,8 +7241,8 @@
         </p:nvSpPr>
         <p:spPr>
           <a:xfrm>
-            <a:off x="7620000" y="3835400"/>
-            <a:ext cx="1701800" cy="660400"/>
+            <a:off x="7620000" y="3556000"/>
+            <a:ext cx="1701800" cy="381000"/>
           </a:xfrm>
           <a:prstGeom prst="roundRect">
             <a:avLst>
@@ -7270,7 +7259,7 @@
           </a:ln>
         </p:spPr>
         <p:txBody>
-          <a:bodyPr lIns="50800" tIns="12700" rIns="50800" bIns="12700" rtlCol="0" anchor="ctr"/>
+          <a:bodyPr lIns="25400" tIns="12700" rIns="25400" bIns="12700" rtlCol="0" anchor="ctr"/>
           <a:lstStyle/>
           <a:p>
             <a:pPr algn="ctr">
@@ -7279,7 +7268,7 @@
               </a:lnSpc>
             </a:pPr>
             <a:r>
-              <a:rPr lang="ru-RU" sz="1000">
+              <a:rPr lang="ru-RU" sz="900">
                 <a:solidFill>
                   <a:srgbClr val="464646"/>
                 </a:solidFill>
@@ -7289,7 +7278,7 @@
               <a:t>Менеджер проектов</a:t>
             </a:r>
             <a:r>
-              <a:rPr lang="ru-RU" sz="1000" dirty="0">
+              <a:rPr lang="ru-RU" sz="900" dirty="0">
                 <a:solidFill>
                   <a:srgbClr val="464646"/>
                 </a:solidFill>
@@ -7320,22 +7309,14 @@
               </a:rPr>
               <a:t>Абулхан А.</a:t>
             </a:r>
-            <a:br>
+            <a:r>
               <a:rPr lang="ru-RU" sz="900" b="0" dirty="0">
                 <a:solidFill>
                   <a:srgbClr val="227838"/>
                 </a:solidFill>
                 <a:latin typeface="Segoe UI" panose="020B0502040204020203" pitchFamily="34" charset="0"/>
               </a:rPr>
-            </a:br>
-            <a:r>
-              <a:rPr lang="ru-RU" sz="900" b="0" dirty="0">
-                <a:solidFill>
-                  <a:srgbClr val="227838"/>
-                </a:solidFill>
-                <a:latin typeface="Segoe UI" panose="020B0502040204020203" pitchFamily="34" charset="0"/>
-              </a:rPr>
-              <a:t>615 000</a:t>
+              <a:t> · 615 000</a:t>
             </a:r>
             <a:endParaRPr lang="ru-RU" sz="1100" b="1" dirty="0">
               <a:solidFill>
@@ -7576,7 +7557,7 @@
                 </a:solidFill>
                 <a:latin typeface="Segoe UI" panose="020B0502040204020203" pitchFamily="34" charset="0"/>
               </a:rPr>
-              <a:t>с ноября 2026 года — 23 чел., с декабря 2026 года — ещё 2</a:t>
+              <a:t>с ноября 2026 года — 22 чел., с декабря 2026 года — ещё 1</a:t>
             </a:r>
             <a:r>
               <a:rPr lang="ru-RU" sz="1000" dirty="0">
@@ -7594,7 +7575,7 @@
                 </a:solidFill>
                 <a:latin typeface="Segoe UI" panose="020B0502040204020203" pitchFamily="34" charset="0"/>
               </a:rPr>
-              <a:t>5</a:t>
+              <a:t>7</a:t>
             </a:r>
             <a:r>
               <a:rPr lang="ru-RU" sz="1000" dirty="0">
@@ -7675,13 +7656,13 @@
               </a:rPr>
             </a:br>
             <a:r>
-              <a:rPr lang="ru-RU" sz="1000">
-                <a:solidFill>
-                  <a:srgbClr val="464646"/>
-                </a:solidFill>
-                <a:latin typeface="Segoe UI" panose="020B0502040204020203" pitchFamily="34" charset="0"/>
-              </a:rPr>
-              <a:t>1 000 000</a:t>
+              <a:rPr lang="ru-RU" sz="900" b="0" dirty="0">
+                <a:solidFill>
+                  <a:srgbClr val="227838"/>
+                </a:solidFill>
+                <a:latin typeface="Segoe UI" panose="020B0502040204020203" pitchFamily="34" charset="0"/>
+              </a:rPr>
+              <a:t>1 000 000</a:t>
             </a:r>
             <a:endParaRPr lang="ru-RU" sz="1000" dirty="0">
               <a:solidFill>
@@ -8010,7 +7991,7 @@
         </p:nvCxnSpPr>
         <p:spPr>
           <a:xfrm>
-            <a:off x="9321800" y="4876800"/>
+            <a:off x="9321800" y="4241800"/>
             <a:ext cx="76200" cy="0"/>
           </a:xfrm>
           <a:prstGeom prst="line">
@@ -8031,7 +8012,7 @@
         </p:nvCxnSpPr>
         <p:spPr>
           <a:xfrm>
-            <a:off x="9321800" y="4165600"/>
+            <a:off x="9321800" y="3746500"/>
             <a:ext cx="76200" cy="0"/>
           </a:xfrm>
           <a:prstGeom prst="line">

--- a/TAZA/_документы/Структура ЦАКФ и проектного офиса ТК – от Айгерим 20.10.pptx
+++ b/TAZA/_документы/Структура ЦАКФ и проектного офиса ТК – от Айгерим 20.10.pptx
@@ -7222,7 +7222,7 @@
                 </a:solidFill>
                 <a:latin typeface="Segoe UI" panose="020B0502040204020203" pitchFamily="34" charset="0"/>
               </a:rPr>
-              <a:t> · 615 000</a:t>
+              <a:t> · 800 000</a:t>
             </a:r>
             <a:endParaRPr lang="ru-RU" sz="1100" b="1" dirty="0">
               <a:solidFill>
@@ -7316,7 +7316,7 @@
                 </a:solidFill>
                 <a:latin typeface="Segoe UI" panose="020B0502040204020203" pitchFamily="34" charset="0"/>
               </a:rPr>
-              <a:t> · 615 000</a:t>
+              <a:t> · 800 000</a:t>
             </a:r>
             <a:endParaRPr lang="ru-RU" sz="1100" b="1" dirty="0">
               <a:solidFill>

--- a/TAZA/_документы/Структура ЦАКФ и проектного офиса ТК – от Айгерим 20.10.pptx
+++ b/TAZA/_документы/Структура ЦАКФ и проектного офиса ТК – от Айгерим 20.10.pptx
@@ -4628,7 +4628,24 @@
                 </a:solidFill>
                 <a:latin typeface="Segoe UI" panose="020B0502040204020203" pitchFamily="34" charset="0"/>
               </a:rPr>
-              <a:t>Национальный координатор</a:t>
+              <a:t>Руководитель проектного офиса</a:t>
+            </a:r>
+            <a:br>
+              <a:rPr lang="ru-RU" sz="1000" b="1" dirty="0">
+                <a:solidFill>
+                  <a:srgbClr val="FFFFFF"/>
+                </a:solidFill>
+                <a:latin typeface="Segoe UI" panose="020B0502040204020203" pitchFamily="34" charset="0"/>
+              </a:rPr>
+            </a:br>
+            <a:r>
+              <a:rPr lang="ru-RU" sz="1000" b="1" dirty="0">
+                <a:solidFill>
+                  <a:srgbClr val="FFFFFF"/>
+                </a:solidFill>
+                <a:latin typeface="Segoe UI" panose="020B0502040204020203" pitchFamily="34" charset="0"/>
+              </a:rPr>
+              <a:t>«Таза Қазақстан»</a:t>
             </a:r>
             <a:endParaRPr lang="ru-RU" sz="1000" b="1" dirty="0">
               <a:solidFill>

--- a/TAZA/_документы/Структура ЦАКФ и проектного офиса ТК – от Айгерим 20.10.pptx
+++ b/TAZA/_документы/Структура ЦАКФ и проектного офиса ТК – от Айгерим 20.10.pptx
@@ -4628,24 +4628,7 @@
                 </a:solidFill>
                 <a:latin typeface="Segoe UI" panose="020B0502040204020203" pitchFamily="34" charset="0"/>
               </a:rPr>
-              <a:t>Руководитель проектного офиса</a:t>
-            </a:r>
-            <a:br>
-              <a:rPr lang="ru-RU" sz="1000" b="1" dirty="0">
-                <a:solidFill>
-                  <a:srgbClr val="FFFFFF"/>
-                </a:solidFill>
-                <a:latin typeface="Segoe UI" panose="020B0502040204020203" pitchFamily="34" charset="0"/>
-              </a:rPr>
-            </a:br>
-            <a:r>
-              <a:rPr lang="ru-RU" sz="1000" b="1" dirty="0">
-                <a:solidFill>
-                  <a:srgbClr val="FFFFFF"/>
-                </a:solidFill>
-                <a:latin typeface="Segoe UI" panose="020B0502040204020203" pitchFamily="34" charset="0"/>
-              </a:rPr>
-              <a:t>«Таза Қазақстан»</a:t>
+              <a:t>Проектный офис «Таза Қазақстан»</a:t>
             </a:r>
             <a:endParaRPr lang="ru-RU" sz="1000" b="1" dirty="0">
               <a:solidFill>
@@ -4690,6 +4673,15 @@
                 <a:spcPct val="90000"/>
               </a:lnSpc>
             </a:pPr>
+            <a:r>
+              <a:rPr lang="ru-RU" sz="1000" dirty="0">
+                <a:solidFill>
+                  <a:srgbClr val="464646"/>
+                </a:solidFill>
+                <a:latin typeface="Segoe UI" panose="020B0502040204020203" pitchFamily="34" charset="0"/>
+              </a:rPr>
+              <a:t>рук. — </a:t>
+            </a:r>
             <a:r>
               <a:rPr lang="ru-RU" sz="1000" b="1" dirty="0">
                 <a:solidFill>

--- a/TAZA/_документы/Структура ЦАКФ и проектного офиса ТК – от Айгерим 20.10.pptx
+++ b/TAZA/_документы/Структура ЦАКФ и проектного офиса ТК – от Айгерим 20.10.pptx
@@ -6842,7 +6842,7 @@
                 </a:solidFill>
                 <a:latin typeface="Segoe UI" panose="020B0502040204020203" pitchFamily="34" charset="0"/>
               </a:rPr>
-              <a:t>30</a:t>
+              <a:t>31</a:t>
             </a:r>
             <a:endParaRPr lang="ru-RU" sz="1000" b="1" dirty="0">
               <a:solidFill>
@@ -6908,7 +6908,7 @@
                 </a:solidFill>
                 <a:latin typeface="Segoe UI" panose="020B0502040204020203" pitchFamily="34" charset="0"/>
               </a:rPr>
-              <a:t>аутсорс — 7 позиций</a:t>
+              <a:t>вакансия — 1 (исп. ГИД), аутсорс — 7</a:t>
             </a:r>
             <a:endParaRPr lang="ru-RU" sz="900" b="1" dirty="0">
               <a:solidFill>
@@ -7602,7 +7602,7 @@
                 </a:solidFill>
                 <a:latin typeface="Segoe UI" panose="020B0502040204020203" pitchFamily="34" charset="0"/>
               </a:rPr>
-              <a:t>всего в 2027 году 30 чел.</a:t>
+              <a:t>всего 30 чел. + вакансия (исп. ГИД)</a:t>
             </a:r>
             <a:endParaRPr lang="ru-RU" sz="1000" b="1" dirty="0">
               <a:solidFill>
@@ -7787,7 +7787,7 @@
                 </a:solidFill>
                 <a:latin typeface="Segoe UI" panose="020B0502040204020203" pitchFamily="34" charset="0"/>
               </a:rPr>
-              <a:t>Проектный офис для Центральной Азии по изменению климата и зеленой энергетике (4)</a:t>
+              <a:t>Проектный офис для Центральной Азии по изменению климата и зеленой энергетике (1+4)</a:t>
             </a:r>
             <a:endParaRPr lang="ru-RU" sz="750" b="1">
               <a:solidFill>
@@ -7842,13 +7842,22 @@
               <a:t>рук. — </a:t>
             </a:r>
             <a:r>
-              <a:rPr lang="ru-RU" sz="1000" b="1" dirty="0">
-                <a:solidFill>
-                  <a:srgbClr val="1F3864"/>
-                </a:solidFill>
-                <a:latin typeface="Segoe UI" panose="020B0502040204020203" pitchFamily="34" charset="0"/>
-              </a:rPr>
-              <a:t>ГИД Қаражан Е.Н.</a:t>
+              <a:rPr lang="ru-RU" sz="1000" i="1" dirty="0">
+                <a:solidFill>
+                  <a:srgbClr val="787878"/>
+                </a:solidFill>
+                <a:latin typeface="Segoe UI" panose="020B0502040204020203" pitchFamily="34" charset="0"/>
+              </a:rPr>
+              <a:t>вакансия</a:t>
+            </a:r>
+            <a:r>
+              <a:rPr lang="ru-RU" sz="900" b="0" dirty="0">
+                <a:solidFill>
+                  <a:srgbClr val="227838"/>
+                </a:solidFill>
+                <a:latin typeface="Segoe UI" panose="020B0502040204020203" pitchFamily="34" charset="0"/>
+              </a:rPr>
+              <a:t> · 1 400 000</a:t>
             </a:r>
             <a:endParaRPr lang="ru-RU" sz="1100" b="1" dirty="0">
               <a:solidFill>

--- a/TAZA/_документы/Структура ЦАКФ и проектного офиса ТК – от Айгерим 20.10.pptx
+++ b/TAZA/_документы/Структура ЦАКФ и проектного офиса ТК – от Айгерим 20.10.pptx
@@ -6842,7 +6842,7 @@
                 </a:solidFill>
                 <a:latin typeface="Segoe UI" panose="020B0502040204020203" pitchFamily="34" charset="0"/>
               </a:rPr>
-              <a:t>31</a:t>
+              <a:t>30</a:t>
             </a:r>
             <a:endParaRPr lang="ru-RU" sz="1000" b="1" dirty="0">
               <a:solidFill>
@@ -6908,7 +6908,7 @@
                 </a:solidFill>
                 <a:latin typeface="Segoe UI" panose="020B0502040204020203" pitchFamily="34" charset="0"/>
               </a:rPr>
-              <a:t>вакансия — 1 (исп. ГИД), аутсорс — 7</a:t>
+              <a:t>аутсорс — 7 позиций</a:t>
             </a:r>
             <a:endParaRPr lang="ru-RU" sz="900" b="1" dirty="0">
               <a:solidFill>
@@ -7085,7 +7085,7 @@
                 <a:latin typeface="Segoe UI" panose="020B0502040204020203" pitchFamily="34" charset="0"/>
                 <a:sym typeface="+mn-ea"/>
               </a:rPr>
-              <a:t> – эколог</a:t>
+              <a:t> (эколог)</a:t>
             </a:r>
             <a:endParaRPr lang="ru-RU" sz="900" dirty="0">
               <a:solidFill>
@@ -7200,7 +7200,7 @@
                 </a:solidFill>
                 <a:latin typeface="Segoe UI" panose="020B0502040204020203" pitchFamily="34" charset="0"/>
               </a:rPr>
-              <a:t> – эколог</a:t>
+              <a:t> (эколог)</a:t>
             </a:r>
             <a:endParaRPr lang="ru-RU" sz="1000" dirty="0">
               <a:solidFill>
@@ -7294,7 +7294,7 @@
                 <a:latin typeface="Segoe UI" panose="020B0502040204020203" pitchFamily="34" charset="0"/>
                 <a:sym typeface="+mn-ea"/>
               </a:rPr>
-              <a:t> – эколог</a:t>
+              <a:t> (эколог)</a:t>
             </a:r>
             <a:endParaRPr lang="ru-RU" sz="1000" dirty="0">
               <a:solidFill>
@@ -7602,7 +7602,7 @@
                 </a:solidFill>
                 <a:latin typeface="Segoe UI" panose="020B0502040204020203" pitchFamily="34" charset="0"/>
               </a:rPr>
-              <a:t>всего 30 чел. + вакансия (исп. ГИД)</a:t>
+              <a:t>всего в 2027 году 30 чел.</a:t>
             </a:r>
             <a:endParaRPr lang="ru-RU" sz="1000" b="1" dirty="0">
               <a:solidFill>
@@ -7787,7 +7787,7 @@
                 </a:solidFill>
                 <a:latin typeface="Segoe UI" panose="020B0502040204020203" pitchFamily="34" charset="0"/>
               </a:rPr>
-              <a:t>Проектный офис для Центральной Азии по изменению климата и зеленой энергетике (1+4)</a:t>
+              <a:t>Проектный офис для Центральной Азии по изменению климата и зеленой энергетике (4)</a:t>
             </a:r>
             <a:endParaRPr lang="ru-RU" sz="750" b="1">
               <a:solidFill>
@@ -7842,22 +7842,13 @@
               <a:t>рук. — </a:t>
             </a:r>
             <a:r>
-              <a:rPr lang="ru-RU" sz="1000" i="1" dirty="0">
-                <a:solidFill>
-                  <a:srgbClr val="787878"/>
-                </a:solidFill>
-                <a:latin typeface="Segoe UI" panose="020B0502040204020203" pitchFamily="34" charset="0"/>
-              </a:rPr>
-              <a:t>вакансия</a:t>
-            </a:r>
-            <a:r>
-              <a:rPr lang="ru-RU" sz="900" b="0" dirty="0">
-                <a:solidFill>
-                  <a:srgbClr val="227838"/>
-                </a:solidFill>
-                <a:latin typeface="Segoe UI" panose="020B0502040204020203" pitchFamily="34" charset="0"/>
-              </a:rPr>
-              <a:t> · 1 400 000</a:t>
+              <a:rPr lang="ru-RU" sz="1000" b="1" dirty="0">
+                <a:solidFill>
+                  <a:srgbClr val="1F3864"/>
+                </a:solidFill>
+                <a:latin typeface="Segoe UI" panose="020B0502040204020203" pitchFamily="34" charset="0"/>
+              </a:rPr>
+              <a:t>ГИД Қаражан Е.Н.</a:t>
             </a:r>
             <a:endParaRPr lang="ru-RU" sz="1100" b="1" dirty="0">
               <a:solidFill>

--- a/TAZA/_документы/Структура ЦАКФ и проектного офиса ТК – от Айгерим 20.10.pptx
+++ b/TAZA/_документы/Структура ЦАКФ и проектного офиса ТК – от Айгерим 20.10.pptx
@@ -4267,7 +4267,7 @@
                 </a:solidFill>
                 <a:latin typeface="Segoe UI" panose="020B0502040204020203" pitchFamily="34" charset="0"/>
               </a:rPr>
-              <a:t>Советник ГИД по стратегии и науке</a:t>
+              <a:t>Советник по стратегии и науке</a:t>
             </a:r>
             <a:endParaRPr lang="ru-RU" sz="900" dirty="0">
               <a:solidFill>
